--- a/Inversion Code/Figues/New Microsoft PowerPoint Presentation.pptx
+++ b/Inversion Code/Figues/New Microsoft PowerPoint Presentation.pptx
@@ -5,11 +5,12 @@
     <p:sldMasterId id="2147483648" r:id="rId1"/>
   </p:sldMasterIdLst>
   <p:notesMasterIdLst>
-    <p:notesMasterId r:id="rId4"/>
+    <p:notesMasterId r:id="rId5"/>
   </p:notesMasterIdLst>
   <p:sldIdLst>
     <p:sldId id="786" r:id="rId2"/>
-    <p:sldId id="256" r:id="rId3"/>
+    <p:sldId id="787" r:id="rId3"/>
+    <p:sldId id="256" r:id="rId4"/>
   </p:sldIdLst>
   <p:sldSz cx="12192000" cy="6858000"/>
   <p:notesSz cx="6858000" cy="9144000"/>
@@ -198,7 +199,7 @@
           <a:p>
             <a:fld id="{776AF8F6-1F37-4398-AD74-DAFD3B49C3A3}" type="datetimeFigureOut">
               <a:rPr lang="en-CA" smtClean="0"/>
-              <a:t>2026-03-23</a:t>
+              <a:t>2026-04-09</a:t>
             </a:fld>
             <a:endParaRPr lang="en-CA"/>
           </a:p>
@@ -579,6 +580,119 @@
 </p:notes>
 </file>
 
+<file path=ppt/notesSlides/notesSlide2.xml><?xml version="1.0" encoding="utf-8"?>
+<p:notes xmlns:a="http://schemas.openxmlformats.org/drawingml/2006/main" xmlns:r="http://schemas.openxmlformats.org/officeDocument/2006/relationships" xmlns:p="http://schemas.openxmlformats.org/presentationml/2006/main">
+  <p:cSld>
+    <p:spTree>
+      <p:nvGrpSpPr>
+        <p:cNvPr id="1" name="">
+          <a:extLst>
+            <a:ext uri="{FF2B5EF4-FFF2-40B4-BE49-F238E27FC236}">
+              <a16:creationId xmlns:a16="http://schemas.microsoft.com/office/drawing/2014/main" id="{399FD04D-CD73-A13C-2C36-5392DFA94E1C}"/>
+            </a:ext>
+          </a:extLst>
+        </p:cNvPr>
+        <p:cNvGrpSpPr/>
+        <p:nvPr/>
+      </p:nvGrpSpPr>
+      <p:grpSpPr>
+        <a:xfrm>
+          <a:off x="0" y="0"/>
+          <a:ext cx="0" cy="0"/>
+          <a:chOff x="0" y="0"/>
+          <a:chExt cx="0" cy="0"/>
+        </a:xfrm>
+      </p:grpSpPr>
+      <p:sp>
+        <p:nvSpPr>
+          <p:cNvPr id="2" name="Slide Image Placeholder 1">
+            <a:extLst>
+              <a:ext uri="{FF2B5EF4-FFF2-40B4-BE49-F238E27FC236}">
+                <a16:creationId xmlns:a16="http://schemas.microsoft.com/office/drawing/2014/main" id="{215A15CD-CD2B-3633-0681-04FE33526BEE}"/>
+              </a:ext>
+            </a:extLst>
+          </p:cNvPr>
+          <p:cNvSpPr>
+            <a:spLocks noGrp="1" noRot="1" noChangeAspect="1"/>
+          </p:cNvSpPr>
+          <p:nvPr>
+            <p:ph type="sldImg"/>
+          </p:nvPr>
+        </p:nvSpPr>
+        <p:spPr/>
+      </p:sp>
+      <p:sp>
+        <p:nvSpPr>
+          <p:cNvPr id="3" name="Notes Placeholder 2">
+            <a:extLst>
+              <a:ext uri="{FF2B5EF4-FFF2-40B4-BE49-F238E27FC236}">
+                <a16:creationId xmlns:a16="http://schemas.microsoft.com/office/drawing/2014/main" id="{FA35804C-AC39-92C6-3697-C7E6F54E936B}"/>
+              </a:ext>
+            </a:extLst>
+          </p:cNvPr>
+          <p:cNvSpPr>
+            <a:spLocks noGrp="1"/>
+          </p:cNvSpPr>
+          <p:nvPr>
+            <p:ph type="body" idx="1"/>
+          </p:nvPr>
+        </p:nvSpPr>
+        <p:spPr/>
+        <p:txBody>
+          <a:bodyPr/>
+          <a:lstStyle/>
+          <a:p>
+            <a:r>
+              <a:rPr lang="zh-CN" altLang="en-US" dirty="0"/>
+              <a:t>      </a:t>
+            </a:r>
+            <a:endParaRPr lang="en-US" dirty="0"/>
+          </a:p>
+        </p:txBody>
+      </p:sp>
+      <p:sp>
+        <p:nvSpPr>
+          <p:cNvPr id="4" name="Slide Number Placeholder 3">
+            <a:extLst>
+              <a:ext uri="{FF2B5EF4-FFF2-40B4-BE49-F238E27FC236}">
+                <a16:creationId xmlns:a16="http://schemas.microsoft.com/office/drawing/2014/main" id="{FB6BA83A-ACF7-8B2F-822B-F401AA818037}"/>
+              </a:ext>
+            </a:extLst>
+          </p:cNvPr>
+          <p:cNvSpPr>
+            <a:spLocks noGrp="1"/>
+          </p:cNvSpPr>
+          <p:nvPr>
+            <p:ph type="sldNum" sz="quarter" idx="5"/>
+          </p:nvPr>
+        </p:nvSpPr>
+        <p:spPr/>
+        <p:txBody>
+          <a:bodyPr/>
+          <a:lstStyle/>
+          <a:p>
+            <a:fld id="{DA6F231F-2C4E-BA45-BAC4-3FA1ED6D02FA}" type="slidenum">
+              <a:rPr lang="fr-CA" smtClean="0"/>
+              <a:pPr/>
+              <a:t>2</a:t>
+            </a:fld>
+            <a:endParaRPr lang="fr-CA"/>
+          </a:p>
+        </p:txBody>
+      </p:sp>
+    </p:spTree>
+    <p:extLst>
+      <p:ext uri="{BB962C8B-B14F-4D97-AF65-F5344CB8AC3E}">
+        <p14:creationId xmlns:p14="http://schemas.microsoft.com/office/powerpoint/2010/main" val="637048273"/>
+      </p:ext>
+    </p:extLst>
+  </p:cSld>
+  <p:clrMapOvr>
+    <a:masterClrMapping/>
+  </p:clrMapOvr>
+</p:notes>
+</file>
+
 <file path=ppt/slideLayouts/slideLayout1.xml><?xml version="1.0" encoding="utf-8"?>
 <p:sldLayout xmlns:a="http://schemas.openxmlformats.org/drawingml/2006/main" xmlns:r="http://schemas.openxmlformats.org/officeDocument/2006/relationships" xmlns:p="http://schemas.openxmlformats.org/presentationml/2006/main" type="title" preserve="1">
   <p:cSld name="Title Slide">
@@ -728,7 +842,7 @@
           <a:p>
             <a:fld id="{3CC2C8F8-6525-4465-81C0-71FF039E84F7}" type="datetimeFigureOut">
               <a:rPr lang="en-CA" smtClean="0"/>
-              <a:t>2026-03-23</a:t>
+              <a:t>2026-04-09</a:t>
             </a:fld>
             <a:endParaRPr lang="en-CA"/>
           </a:p>
@@ -928,7 +1042,7 @@
           <a:p>
             <a:fld id="{3CC2C8F8-6525-4465-81C0-71FF039E84F7}" type="datetimeFigureOut">
               <a:rPr lang="en-CA" smtClean="0"/>
-              <a:t>2026-03-23</a:t>
+              <a:t>2026-04-09</a:t>
             </a:fld>
             <a:endParaRPr lang="en-CA"/>
           </a:p>
@@ -1138,7 +1252,7 @@
           <a:p>
             <a:fld id="{3CC2C8F8-6525-4465-81C0-71FF039E84F7}" type="datetimeFigureOut">
               <a:rPr lang="en-CA" smtClean="0"/>
-              <a:t>2026-03-23</a:t>
+              <a:t>2026-04-09</a:t>
             </a:fld>
             <a:endParaRPr lang="en-CA"/>
           </a:p>
@@ -1245,7 +1359,7 @@
           <a:p>
             <a:fld id="{B46BB2F2-7DF4-4247-B7F4-C49F7EF7E9E1}" type="datetime1">
               <a:rPr lang="fr-FR" smtClean="0"/>
-              <a:t>23/03/2026</a:t>
+              <a:t>09/04/2026</a:t>
             </a:fld>
             <a:endParaRPr lang="en-US"/>
           </a:p>
@@ -1542,7 +1656,7 @@
           <a:p>
             <a:fld id="{3CC2C8F8-6525-4465-81C0-71FF039E84F7}" type="datetimeFigureOut">
               <a:rPr lang="en-CA" smtClean="0"/>
-              <a:t>2026-03-23</a:t>
+              <a:t>2026-04-09</a:t>
             </a:fld>
             <a:endParaRPr lang="en-CA"/>
           </a:p>
@@ -1818,7 +1932,7 @@
           <a:p>
             <a:fld id="{3CC2C8F8-6525-4465-81C0-71FF039E84F7}" type="datetimeFigureOut">
               <a:rPr lang="en-CA" smtClean="0"/>
-              <a:t>2026-03-23</a:t>
+              <a:t>2026-04-09</a:t>
             </a:fld>
             <a:endParaRPr lang="en-CA"/>
           </a:p>
@@ -2086,7 +2200,7 @@
           <a:p>
             <a:fld id="{3CC2C8F8-6525-4465-81C0-71FF039E84F7}" type="datetimeFigureOut">
               <a:rPr lang="en-CA" smtClean="0"/>
-              <a:t>2026-03-23</a:t>
+              <a:t>2026-04-09</a:t>
             </a:fld>
             <a:endParaRPr lang="en-CA"/>
           </a:p>
@@ -2501,7 +2615,7 @@
           <a:p>
             <a:fld id="{3CC2C8F8-6525-4465-81C0-71FF039E84F7}" type="datetimeFigureOut">
               <a:rPr lang="en-CA" smtClean="0"/>
-              <a:t>2026-03-23</a:t>
+              <a:t>2026-04-09</a:t>
             </a:fld>
             <a:endParaRPr lang="en-CA"/>
           </a:p>
@@ -2643,7 +2757,7 @@
           <a:p>
             <a:fld id="{3CC2C8F8-6525-4465-81C0-71FF039E84F7}" type="datetimeFigureOut">
               <a:rPr lang="en-CA" smtClean="0"/>
-              <a:t>2026-03-23</a:t>
+              <a:t>2026-04-09</a:t>
             </a:fld>
             <a:endParaRPr lang="en-CA"/>
           </a:p>
@@ -2756,7 +2870,7 @@
           <a:p>
             <a:fld id="{3CC2C8F8-6525-4465-81C0-71FF039E84F7}" type="datetimeFigureOut">
               <a:rPr lang="en-CA" smtClean="0"/>
-              <a:t>2026-03-23</a:t>
+              <a:t>2026-04-09</a:t>
             </a:fld>
             <a:endParaRPr lang="en-CA"/>
           </a:p>
@@ -3069,7 +3183,7 @@
           <a:p>
             <a:fld id="{3CC2C8F8-6525-4465-81C0-71FF039E84F7}" type="datetimeFigureOut">
               <a:rPr lang="en-CA" smtClean="0"/>
-              <a:t>2026-03-23</a:t>
+              <a:t>2026-04-09</a:t>
             </a:fld>
             <a:endParaRPr lang="en-CA"/>
           </a:p>
@@ -3358,7 +3472,7 @@
           <a:p>
             <a:fld id="{3CC2C8F8-6525-4465-81C0-71FF039E84F7}" type="datetimeFigureOut">
               <a:rPr lang="en-CA" smtClean="0"/>
-              <a:t>2026-03-23</a:t>
+              <a:t>2026-04-09</a:t>
             </a:fld>
             <a:endParaRPr lang="en-CA"/>
           </a:p>
@@ -3601,7 +3715,7 @@
           <a:p>
             <a:fld id="{3CC2C8F8-6525-4465-81C0-71FF039E84F7}" type="datetimeFigureOut">
               <a:rPr lang="en-CA" smtClean="0"/>
-              <a:t>2026-03-23</a:t>
+              <a:t>2026-04-09</a:t>
             </a:fld>
             <a:endParaRPr lang="en-CA"/>
           </a:p>
@@ -4138,13 +4252,13 @@
             <p:nvPr/>
           </p:nvPicPr>
           <p:blipFill>
-            <a:blip r:embed="rId3" cstate="print">
+            <a:blip cstate="print">
               <a:extLst>
                 <a:ext uri="{28A0092B-C50C-407E-A947-70E740481C1C}">
                   <a14:useLocalDpi xmlns:a14="http://schemas.microsoft.com/office/drawing/2010/main" val="0"/>
                 </a:ext>
                 <a:ext uri="{96DAC541-7B7A-43D3-8B79-37D633B846F1}">
-                  <asvg:svgBlip xmlns:asvg="http://schemas.microsoft.com/office/drawing/2016/SVG/main" r:embed="rId4"/>
+                  <asvg:svgBlip xmlns:asvg="http://schemas.microsoft.com/office/drawing/2016/SVG/main" r:embed="rId3"/>
                 </a:ext>
               </a:extLst>
             </a:blip>
@@ -4334,8 +4448,8 @@
             </a:p>
           </p:txBody>
         </p:sp>
-        <mc:AlternateContent xmlns:mc="http://schemas.openxmlformats.org/markup-compatibility/2006">
-          <mc:Choice xmlns:a14="http://schemas.microsoft.com/office/drawing/2010/main" Requires="a14">
+        <mc:AlternateContent xmlns:mc="http://schemas.openxmlformats.org/markup-compatibility/2006" xmlns:a14="http://schemas.microsoft.com/office/drawing/2010/main">
+          <mc:Choice Requires="a14">
             <p:sp>
               <p:nvSpPr>
                 <p:cNvPr id="6" name="Rectangle: Rounded Corners 119">
@@ -4486,7 +4600,7 @@
               </p:txBody>
             </p:sp>
           </mc:Choice>
-          <mc:Fallback>
+          <mc:Fallback xmlns="">
             <p:sp>
               <p:nvSpPr>
                 <p:cNvPr id="6" name="Rectangle: Rounded Corners 119">
@@ -4539,8 +4653,8 @@
             </p:sp>
           </mc:Fallback>
         </mc:AlternateContent>
-        <mc:AlternateContent xmlns:mc="http://schemas.openxmlformats.org/markup-compatibility/2006">
-          <mc:Choice xmlns:a14="http://schemas.microsoft.com/office/drawing/2010/main" Requires="a14">
+        <mc:AlternateContent xmlns:mc="http://schemas.openxmlformats.org/markup-compatibility/2006" xmlns:a14="http://schemas.microsoft.com/office/drawing/2010/main">
+          <mc:Choice Requires="a14">
             <p:sp>
               <p:nvSpPr>
                 <p:cNvPr id="8" name="Rectangle: Rounded Corners 119">
@@ -4645,7 +4759,7 @@
               </p:txBody>
             </p:sp>
           </mc:Choice>
-          <mc:Fallback>
+          <mc:Fallback xmlns="">
             <p:sp>
               <p:nvSpPr>
                 <p:cNvPr id="8" name="Rectangle: Rounded Corners 119">
@@ -4739,8 +4853,8 @@
             </a:fontRef>
           </p:style>
         </p:cxnSp>
-        <mc:AlternateContent xmlns:mc="http://schemas.openxmlformats.org/markup-compatibility/2006">
-          <mc:Choice xmlns:a14="http://schemas.microsoft.com/office/drawing/2010/main" Requires="a14">
+        <mc:AlternateContent xmlns:mc="http://schemas.openxmlformats.org/markup-compatibility/2006" xmlns:a14="http://schemas.microsoft.com/office/drawing/2010/main">
+          <mc:Choice Requires="a14">
             <p:sp>
               <p:nvSpPr>
                 <p:cNvPr id="11" name="Rectangle: Rounded Corners 119">
@@ -5160,7 +5274,7 @@
               </p:txBody>
             </p:sp>
           </mc:Choice>
-          <mc:Fallback>
+          <mc:Fallback xmlns="">
             <p:sp>
               <p:nvSpPr>
                 <p:cNvPr id="11" name="Rectangle: Rounded Corners 119">
@@ -5672,8 +5786,8 @@
             </a:fontRef>
           </p:style>
         </p:cxnSp>
-        <mc:AlternateContent xmlns:mc="http://schemas.openxmlformats.org/markup-compatibility/2006">
-          <mc:Choice xmlns:a14="http://schemas.microsoft.com/office/drawing/2010/main" Requires="a14">
+        <mc:AlternateContent xmlns:mc="http://schemas.openxmlformats.org/markup-compatibility/2006" xmlns:a14="http://schemas.microsoft.com/office/drawing/2010/main">
+          <mc:Choice Requires="a14">
             <p:sp>
               <p:nvSpPr>
                 <p:cNvPr id="31" name="Rectangle: Rounded Corners 119">
@@ -5784,7 +5898,7 @@
               </p:txBody>
             </p:sp>
           </mc:Choice>
-          <mc:Fallback>
+          <mc:Fallback xmlns="">
             <p:sp>
               <p:nvSpPr>
                 <p:cNvPr id="31" name="Rectangle: Rounded Corners 119">
@@ -5852,6 +5966,1939 @@
 </file>
 
 <file path=ppt/slides/slide2.xml><?xml version="1.0" encoding="utf-8"?>
+<p:sld xmlns:a="http://schemas.openxmlformats.org/drawingml/2006/main" xmlns:r="http://schemas.openxmlformats.org/officeDocument/2006/relationships" xmlns:p="http://schemas.openxmlformats.org/presentationml/2006/main">
+  <p:cSld>
+    <p:spTree>
+      <p:nvGrpSpPr>
+        <p:cNvPr id="1" name="">
+          <a:extLst>
+            <a:ext uri="{FF2B5EF4-FFF2-40B4-BE49-F238E27FC236}">
+              <a16:creationId xmlns:a16="http://schemas.microsoft.com/office/drawing/2014/main" id="{F3FD5223-5F56-47E7-D05F-B51A7AF6049A}"/>
+            </a:ext>
+          </a:extLst>
+        </p:cNvPr>
+        <p:cNvGrpSpPr/>
+        <p:nvPr/>
+      </p:nvGrpSpPr>
+      <p:grpSpPr>
+        <a:xfrm>
+          <a:off x="0" y="0"/>
+          <a:ext cx="0" cy="0"/>
+          <a:chOff x="0" y="0"/>
+          <a:chExt cx="0" cy="0"/>
+        </a:xfrm>
+      </p:grpSpPr>
+      <p:sp>
+        <p:nvSpPr>
+          <p:cNvPr id="4" name="Slide Number Placeholder 3">
+            <a:extLst>
+              <a:ext uri="{FF2B5EF4-FFF2-40B4-BE49-F238E27FC236}">
+                <a16:creationId xmlns:a16="http://schemas.microsoft.com/office/drawing/2014/main" id="{7ADFFEB7-66FE-8F0C-0E99-C7AC56CFA0A2}"/>
+              </a:ext>
+            </a:extLst>
+          </p:cNvPr>
+          <p:cNvSpPr>
+            <a:spLocks noGrp="1"/>
+          </p:cNvSpPr>
+          <p:nvPr>
+            <p:ph type="sldNum" sz="quarter" idx="12"/>
+          </p:nvPr>
+        </p:nvSpPr>
+        <p:spPr/>
+        <p:txBody>
+          <a:bodyPr/>
+          <a:lstStyle/>
+          <a:p>
+            <a:fld id="{DBAAFE73-B4CD-4A9A-A1F8-B2B1D914CB4A}" type="slidenum">
+              <a:rPr lang="en-US" sz="1400" smtClean="0">
+                <a:latin typeface="Arial" panose="020B0604020202020204" pitchFamily="34" charset="0"/>
+                <a:cs typeface="Arial" panose="020B0604020202020204" pitchFamily="34" charset="0"/>
+              </a:rPr>
+              <a:pPr/>
+              <a:t>2</a:t>
+            </a:fld>
+            <a:endParaRPr lang="en-US" sz="1400" dirty="0">
+              <a:latin typeface="Arial" panose="020B0604020202020204" pitchFamily="34" charset="0"/>
+              <a:cs typeface="Arial" panose="020B0604020202020204" pitchFamily="34" charset="0"/>
+            </a:endParaRPr>
+          </a:p>
+        </p:txBody>
+      </p:sp>
+      <p:sp>
+        <p:nvSpPr>
+          <p:cNvPr id="147" name="TextBox 146">
+            <a:extLst>
+              <a:ext uri="{FF2B5EF4-FFF2-40B4-BE49-F238E27FC236}">
+                <a16:creationId xmlns:a16="http://schemas.microsoft.com/office/drawing/2014/main" id="{27085C4E-4D0D-ED0B-DD49-964BD8571BC3}"/>
+              </a:ext>
+            </a:extLst>
+          </p:cNvPr>
+          <p:cNvSpPr txBox="1"/>
+          <p:nvPr/>
+        </p:nvSpPr>
+        <p:spPr>
+          <a:xfrm>
+            <a:off x="12396345" y="348645"/>
+            <a:ext cx="453970" cy="369332"/>
+          </a:xfrm>
+          <a:prstGeom prst="rect">
+            <a:avLst/>
+          </a:prstGeom>
+          <a:noFill/>
+        </p:spPr>
+        <p:txBody>
+          <a:bodyPr wrap="none" rtlCol="0">
+            <a:spAutoFit/>
+          </a:bodyPr>
+          <a:lstStyle/>
+          <a:p>
+            <a:r>
+              <a:rPr lang="en-US" altLang="zh-CN" dirty="0">
+                <a:latin typeface="Arial" panose="020B0604020202020204" pitchFamily="34" charset="0"/>
+                <a:cs typeface="Arial" panose="020B0604020202020204" pitchFamily="34" charset="0"/>
+              </a:rPr>
+              <a:t>(c)</a:t>
+            </a:r>
+            <a:endParaRPr lang="en-US" dirty="0">
+              <a:latin typeface="Arial" panose="020B0604020202020204" pitchFamily="34" charset="0"/>
+              <a:cs typeface="Arial" panose="020B0604020202020204" pitchFamily="34" charset="0"/>
+            </a:endParaRPr>
+          </a:p>
+        </p:txBody>
+      </p:sp>
+      <p:grpSp>
+        <p:nvGrpSpPr>
+          <p:cNvPr id="34" name="Group 33">
+            <a:extLst>
+              <a:ext uri="{FF2B5EF4-FFF2-40B4-BE49-F238E27FC236}">
+                <a16:creationId xmlns:a16="http://schemas.microsoft.com/office/drawing/2014/main" id="{EF352EDE-4F06-66E8-A35C-03D25DBC4070}"/>
+              </a:ext>
+            </a:extLst>
+          </p:cNvPr>
+          <p:cNvGrpSpPr/>
+          <p:nvPr/>
+        </p:nvGrpSpPr>
+        <p:grpSpPr>
+          <a:xfrm>
+            <a:off x="1117963" y="717977"/>
+            <a:ext cx="5625191" cy="4262061"/>
+            <a:chOff x="2024744" y="824290"/>
+            <a:chExt cx="5625191" cy="4262061"/>
+          </a:xfrm>
+        </p:grpSpPr>
+        <p:pic>
+          <p:nvPicPr>
+            <p:cNvPr id="101" name="Graphic 100" descr="Back RTL">
+              <a:extLst>
+                <a:ext uri="{FF2B5EF4-FFF2-40B4-BE49-F238E27FC236}">
+                  <a16:creationId xmlns:a16="http://schemas.microsoft.com/office/drawing/2014/main" id="{7F95680D-0CF3-52F2-2118-6FF5811A478D}"/>
+                </a:ext>
+              </a:extLst>
+            </p:cNvPr>
+            <p:cNvPicPr>
+              <a:picLocks noChangeAspect="1"/>
+            </p:cNvPicPr>
+            <p:nvPr/>
+          </p:nvPicPr>
+          <p:blipFill>
+            <a:blip cstate="print">
+              <a:extLst>
+                <a:ext uri="{28A0092B-C50C-407E-A947-70E740481C1C}">
+                  <a14:useLocalDpi xmlns:a14="http://schemas.microsoft.com/office/drawing/2010/main" val="0"/>
+                </a:ext>
+                <a:ext uri="{96DAC541-7B7A-43D3-8B79-37D633B846F1}">
+                  <asvg:svgBlip xmlns:asvg="http://schemas.microsoft.com/office/drawing/2016/SVG/main" r:embed="rId3"/>
+                </a:ext>
+              </a:extLst>
+            </a:blip>
+            <a:stretch>
+              <a:fillRect/>
+            </a:stretch>
+          </p:blipFill>
+          <p:spPr>
+            <a:xfrm rot="1068310">
+              <a:off x="3746409" y="2499736"/>
+              <a:ext cx="649024" cy="543728"/>
+            </a:xfrm>
+            <a:prstGeom prst="rect">
+              <a:avLst/>
+            </a:prstGeom>
+          </p:spPr>
+        </p:pic>
+        <p:sp>
+          <p:nvSpPr>
+            <p:cNvPr id="99" name="Rectangle: Rounded Corners 152">
+              <a:extLst>
+                <a:ext uri="{FF2B5EF4-FFF2-40B4-BE49-F238E27FC236}">
+                  <a16:creationId xmlns:a16="http://schemas.microsoft.com/office/drawing/2014/main" id="{2193DCFD-CE7E-28D8-2194-3B44D9A250A5}"/>
+                </a:ext>
+              </a:extLst>
+            </p:cNvPr>
+            <p:cNvSpPr/>
+            <p:nvPr/>
+          </p:nvSpPr>
+          <p:spPr>
+            <a:xfrm>
+              <a:off x="4073978" y="857251"/>
+              <a:ext cx="3575957" cy="4229100"/>
+            </a:xfrm>
+            <a:prstGeom prst="roundRect">
+              <a:avLst/>
+            </a:prstGeom>
+            <a:noFill/>
+            <a:ln w="25400" cap="flat" cmpd="sng" algn="ctr">
+              <a:solidFill>
+                <a:sysClr val="windowText" lastClr="000000"/>
+              </a:solidFill>
+              <a:prstDash val="dash"/>
+              <a:miter lim="800000"/>
+            </a:ln>
+            <a:effectLst/>
+          </p:spPr>
+          <p:txBody>
+            <a:bodyPr rtlCol="0" anchor="ctr"/>
+            <a:lstStyle/>
+            <a:p>
+              <a:pPr marL="0" marR="0" lvl="0" indent="0" algn="just" defTabSz="914400" eaLnBrk="1" fontAlgn="auto" latinLnBrk="0" hangingPunct="1">
+                <a:lnSpc>
+                  <a:spcPct val="100000"/>
+                </a:lnSpc>
+                <a:spcBef>
+                  <a:spcPts val="0"/>
+                </a:spcBef>
+                <a:spcAft>
+                  <a:spcPts val="0"/>
+                </a:spcAft>
+                <a:buClrTx/>
+                <a:buSzTx/>
+                <a:buFontTx/>
+                <a:buNone/>
+                <a:tabLst/>
+                <a:defRPr/>
+              </a:pPr>
+              <a:endParaRPr kumimoji="0" lang="en-US" sz="1800" b="1" i="0" u="none" strike="noStrike" kern="0" cap="none" spc="0" normalizeH="0" baseline="0" noProof="0" dirty="0">
+                <a:ln>
+                  <a:noFill/>
+                </a:ln>
+                <a:solidFill>
+                  <a:prstClr val="black"/>
+                </a:solidFill>
+                <a:effectLst/>
+                <a:uLnTx/>
+                <a:uFillTx/>
+                <a:latin typeface="Arial" panose="020B0604020202020204" pitchFamily="34" charset="0"/>
+                <a:cs typeface="Arial" panose="020B0604020202020204" pitchFamily="34" charset="0"/>
+              </a:endParaRPr>
+            </a:p>
+          </p:txBody>
+        </p:sp>
+        <p:sp>
+          <p:nvSpPr>
+            <p:cNvPr id="145" name="TextBox 144">
+              <a:extLst>
+                <a:ext uri="{FF2B5EF4-FFF2-40B4-BE49-F238E27FC236}">
+                  <a16:creationId xmlns:a16="http://schemas.microsoft.com/office/drawing/2014/main" id="{23F11922-F770-3C7A-954C-272EC5FB0D0C}"/>
+                </a:ext>
+              </a:extLst>
+            </p:cNvPr>
+            <p:cNvSpPr txBox="1"/>
+            <p:nvPr/>
+          </p:nvSpPr>
+          <p:spPr>
+            <a:xfrm>
+              <a:off x="4626154" y="824290"/>
+              <a:ext cx="2159566" cy="369332"/>
+            </a:xfrm>
+            <a:prstGeom prst="rect">
+              <a:avLst/>
+            </a:prstGeom>
+            <a:noFill/>
+          </p:spPr>
+          <p:txBody>
+            <a:bodyPr wrap="none" rtlCol="0">
+              <a:spAutoFit/>
+            </a:bodyPr>
+            <a:lstStyle/>
+            <a:p>
+              <a:r>
+                <a:rPr lang="en-US" altLang="zh-CN" b="1" dirty="0">
+                  <a:latin typeface="Arial" panose="020B0604020202020204" pitchFamily="34" charset="0"/>
+                  <a:cs typeface="Arial" panose="020B0604020202020204" pitchFamily="34" charset="0"/>
+                </a:rPr>
+                <a:t>Inversion process</a:t>
+              </a:r>
+              <a:endParaRPr lang="en-US" b="1" dirty="0">
+                <a:latin typeface="Arial" panose="020B0604020202020204" pitchFamily="34" charset="0"/>
+                <a:cs typeface="Arial" panose="020B0604020202020204" pitchFamily="34" charset="0"/>
+              </a:endParaRPr>
+            </a:p>
+          </p:txBody>
+        </p:sp>
+        <mc:AlternateContent xmlns:mc="http://schemas.openxmlformats.org/markup-compatibility/2006">
+          <mc:Choice xmlns:a14="http://schemas.microsoft.com/office/drawing/2010/main" Requires="a14">
+            <p:sp>
+              <p:nvSpPr>
+                <p:cNvPr id="2" name="Rectangle: Rounded Corners 119">
+                  <a:extLst>
+                    <a:ext uri="{FF2B5EF4-FFF2-40B4-BE49-F238E27FC236}">
+                      <a16:creationId xmlns:a16="http://schemas.microsoft.com/office/drawing/2014/main" id="{FEAF6938-9783-EB21-5877-8AE7AF548739}"/>
+                    </a:ext>
+                  </a:extLst>
+                </p:cNvPr>
+                <p:cNvSpPr/>
+                <p:nvPr/>
+              </p:nvSpPr>
+              <p:spPr>
+                <a:xfrm>
+                  <a:off x="4307458" y="1212184"/>
+                  <a:ext cx="2885243" cy="435708"/>
+                </a:xfrm>
+                <a:prstGeom prst="roundRect">
+                  <a:avLst/>
+                </a:prstGeom>
+                <a:solidFill>
+                  <a:schemeClr val="accent3">
+                    <a:lumMod val="40000"/>
+                    <a:lumOff val="60000"/>
+                  </a:schemeClr>
+                </a:solidFill>
+                <a:ln w="34925" cap="flat" cmpd="sng" algn="ctr">
+                  <a:solidFill>
+                    <a:sysClr val="windowText" lastClr="000000"/>
+                  </a:solidFill>
+                  <a:prstDash val="solid"/>
+                  <a:miter lim="800000"/>
+                </a:ln>
+                <a:effectLst/>
+              </p:spPr>
+              <p:txBody>
+                <a:bodyPr rtlCol="0" anchor="ctr"/>
+                <a:lstStyle/>
+                <a:p>
+                  <a:pPr algn="ctr">
+                    <a:defRPr/>
+                  </a:pPr>
+                  <a:r>
+                    <a:rPr lang="en-CA" altLang="zh-CN" sz="1200" b="1" dirty="0">
+                      <a:latin typeface="Arial" panose="020B0604020202020204" pitchFamily="34" charset="0"/>
+                      <a:cs typeface="Arial" panose="020B0604020202020204" pitchFamily="34" charset="0"/>
+                    </a:rPr>
+                    <a:t>Initialization of </a:t>
+                  </a:r>
+                  <a14:m>
+                    <m:oMath xmlns:m="http://schemas.openxmlformats.org/officeDocument/2006/math">
+                      <m:r>
+                        <m:rPr>
+                          <m:sty m:val="p"/>
+                        </m:rPr>
+                        <a:rPr lang="el-GR" altLang="zh-CN" sz="1600" i="1">
+                          <a:latin typeface="Cambria Math" panose="02040503050406030204" pitchFamily="18" charset="0"/>
+                          <a:cs typeface="Arial" panose="020B0604020202020204" pitchFamily="34" charset="0"/>
+                        </a:rPr>
+                        <m:t>λ</m:t>
+                      </m:r>
+                    </m:oMath>
+                  </a14:m>
+                  <a:endParaRPr lang="en-US" sz="1200" i="1" dirty="0">
+                    <a:latin typeface="Arial" panose="020B0604020202020204" pitchFamily="34" charset="0"/>
+                    <a:cs typeface="Arial" panose="020B0604020202020204" pitchFamily="34" charset="0"/>
+                  </a:endParaRPr>
+                </a:p>
+              </p:txBody>
+            </p:sp>
+          </mc:Choice>
+          <mc:Fallback>
+            <p:sp>
+              <p:nvSpPr>
+                <p:cNvPr id="2" name="Rectangle: Rounded Corners 119">
+                  <a:extLst>
+                    <a:ext uri="{FF2B5EF4-FFF2-40B4-BE49-F238E27FC236}">
+                      <a16:creationId xmlns:a16="http://schemas.microsoft.com/office/drawing/2014/main" id="{FEAF6938-9783-EB21-5877-8AE7AF548739}"/>
+                    </a:ext>
+                  </a:extLst>
+                </p:cNvPr>
+                <p:cNvSpPr>
+                  <a:spLocks noRot="1" noChangeAspect="1" noMove="1" noResize="1" noEditPoints="1" noAdjustHandles="1" noChangeArrowheads="1" noChangeShapeType="1" noTextEdit="1"/>
+                </p:cNvSpPr>
+                <p:nvPr/>
+              </p:nvSpPr>
+              <p:spPr>
+                <a:xfrm>
+                  <a:off x="4307458" y="1212184"/>
+                  <a:ext cx="2885243" cy="435708"/>
+                </a:xfrm>
+                <a:prstGeom prst="roundRect">
+                  <a:avLst/>
+                </a:prstGeom>
+                <a:blipFill>
+                  <a:blip r:embed="rId4"/>
+                  <a:stretch>
+                    <a:fillRect/>
+                  </a:stretch>
+                </a:blipFill>
+                <a:ln w="34925" cap="flat" cmpd="sng" algn="ctr">
+                  <a:solidFill>
+                    <a:sysClr val="windowText" lastClr="000000"/>
+                  </a:solidFill>
+                  <a:prstDash val="solid"/>
+                  <a:miter lim="800000"/>
+                </a:ln>
+                <a:effectLst/>
+              </p:spPr>
+              <p:txBody>
+                <a:bodyPr/>
+                <a:lstStyle/>
+                <a:p>
+                  <a:r>
+                    <a:rPr lang="en-CA">
+                      <a:noFill/>
+                    </a:rPr>
+                    <a:t> </a:t>
+                  </a:r>
+                </a:p>
+              </p:txBody>
+            </p:sp>
+          </mc:Fallback>
+        </mc:AlternateContent>
+        <mc:AlternateContent xmlns:mc="http://schemas.openxmlformats.org/markup-compatibility/2006">
+          <mc:Choice xmlns:a14="http://schemas.microsoft.com/office/drawing/2010/main" Requires="a14">
+            <p:sp>
+              <p:nvSpPr>
+                <p:cNvPr id="6" name="Rectangle: Rounded Corners 119">
+                  <a:extLst>
+                    <a:ext uri="{FF2B5EF4-FFF2-40B4-BE49-F238E27FC236}">
+                      <a16:creationId xmlns:a16="http://schemas.microsoft.com/office/drawing/2014/main" id="{55432864-FDC6-FC31-F7D8-8B2E274A0581}"/>
+                    </a:ext>
+                  </a:extLst>
+                </p:cNvPr>
+                <p:cNvSpPr/>
+                <p:nvPr/>
+              </p:nvSpPr>
+              <p:spPr>
+                <a:xfrm>
+                  <a:off x="4300103" y="1906051"/>
+                  <a:ext cx="2880908" cy="522888"/>
+                </a:xfrm>
+                <a:prstGeom prst="roundRect">
+                  <a:avLst/>
+                </a:prstGeom>
+                <a:solidFill>
+                  <a:schemeClr val="accent5">
+                    <a:lumMod val="40000"/>
+                    <a:lumOff val="60000"/>
+                  </a:schemeClr>
+                </a:solidFill>
+                <a:ln w="34925" cap="flat" cmpd="sng" algn="ctr">
+                  <a:solidFill>
+                    <a:sysClr val="windowText" lastClr="000000"/>
+                  </a:solidFill>
+                  <a:prstDash val="solid"/>
+                  <a:miter lim="800000"/>
+                </a:ln>
+                <a:effectLst/>
+              </p:spPr>
+              <p:txBody>
+                <a:bodyPr rtlCol="0" anchor="ctr"/>
+                <a:lstStyle/>
+                <a:p>
+                  <a:pPr algn="ctr">
+                    <a:defRPr/>
+                  </a:pPr>
+                  <a:r>
+                    <a:rPr lang="en-CA" altLang="zh-CN" sz="1400" b="1" dirty="0">
+                      <a:latin typeface="Arial" panose="020B0604020202020204" pitchFamily="34" charset="0"/>
+                      <a:cs typeface="Arial" panose="020B0604020202020204" pitchFamily="34" charset="0"/>
+                    </a:rPr>
+                    <a:t>Forward model: </a:t>
+                  </a:r>
+                </a:p>
+                <a:p>
+                  <a:pPr algn="ctr">
+                    <a:defRPr/>
+                  </a:pPr>
+                  <a14:m>
+                    <m:oMath xmlns:m="http://schemas.openxmlformats.org/officeDocument/2006/math">
+                      <m:sSup>
+                        <m:sSupPr>
+                          <m:ctrlPr>
+                            <a:rPr lang="en-CA" altLang="zh-CN" sz="1400" b="1" i="1" dirty="0" smtClean="0">
+                              <a:latin typeface="Cambria Math" panose="02040503050406030204" pitchFamily="18" charset="0"/>
+                              <a:cs typeface="Arial" panose="020B0604020202020204" pitchFamily="34" charset="0"/>
+                            </a:rPr>
+                          </m:ctrlPr>
+                        </m:sSupPr>
+                        <m:e>
+                          <m:r>
+                            <a:rPr lang="en-US" altLang="zh-CN" sz="1400" b="1" i="1" dirty="0">
+                              <a:latin typeface="Cambria Math" panose="02040503050406030204" pitchFamily="18" charset="0"/>
+                              <a:cs typeface="Arial" panose="020B0604020202020204" pitchFamily="34" charset="0"/>
+                            </a:rPr>
+                            <m:t>𝑫</m:t>
+                          </m:r>
+                        </m:e>
+                        <m:sup>
+                          <m:r>
+                            <a:rPr lang="en-CA" altLang="zh-CN" sz="1400" b="1" i="1" dirty="0" smtClean="0">
+                              <a:latin typeface="Cambria Math" panose="02040503050406030204" pitchFamily="18" charset="0"/>
+                              <a:cs typeface="Arial" panose="020B0604020202020204" pitchFamily="34" charset="0"/>
+                            </a:rPr>
+                            <m:t>𝒔𝒊𝒎</m:t>
+                          </m:r>
+                        </m:sup>
+                      </m:sSup>
+                    </m:oMath>
+                  </a14:m>
+                  <a:r>
+                    <a:rPr lang="en-CA" altLang="zh-CN" sz="1400" b="1" dirty="0">
+                      <a:latin typeface="Arial" panose="020B0604020202020204" pitchFamily="34" charset="0"/>
+                      <a:cs typeface="Arial" panose="020B0604020202020204" pitchFamily="34" charset="0"/>
+                    </a:rPr>
+                    <a:t> </a:t>
+                  </a:r>
+                  <a:r>
+                    <a:rPr lang="en-CA" altLang="zh-CN" sz="1200" dirty="0">
+                      <a:latin typeface="Arial" panose="020B0604020202020204" pitchFamily="34" charset="0"/>
+                      <a:cs typeface="Arial" panose="020B0604020202020204" pitchFamily="34" charset="0"/>
+                    </a:rPr>
+                    <a:t>= </a:t>
+                  </a:r>
+                  <a:r>
+                    <a:rPr lang="en-CA" altLang="zh-CN" sz="1200" b="1" dirty="0">
+                      <a:latin typeface="Arial" panose="020B0604020202020204" pitchFamily="34" charset="0"/>
+                      <a:cs typeface="Arial" panose="020B0604020202020204" pitchFamily="34" charset="0"/>
+                    </a:rPr>
+                    <a:t>FEM</a:t>
+                  </a:r>
+                  <a:r>
+                    <a:rPr lang="en-CA" altLang="zh-CN" sz="1200" dirty="0">
+                      <a:latin typeface="Arial" panose="020B0604020202020204" pitchFamily="34" charset="0"/>
+                      <a:cs typeface="Arial" panose="020B0604020202020204" pitchFamily="34" charset="0"/>
+                    </a:rPr>
+                    <a:t>(</a:t>
+                  </a:r>
+                  <a14:m>
+                    <m:oMath xmlns:m="http://schemas.openxmlformats.org/officeDocument/2006/math">
+                      <m:r>
+                        <m:rPr>
+                          <m:sty m:val="p"/>
+                        </m:rPr>
+                        <a:rPr lang="el-GR" altLang="zh-CN" sz="1600" i="1" smtClean="0">
+                          <a:latin typeface="Cambria Math" panose="02040503050406030204" pitchFamily="18" charset="0"/>
+                          <a:cs typeface="Arial" panose="020B0604020202020204" pitchFamily="34" charset="0"/>
+                        </a:rPr>
+                        <m:t>λ</m:t>
+                      </m:r>
+                    </m:oMath>
+                  </a14:m>
+                  <a:r>
+                    <a:rPr lang="en-CA" altLang="zh-CN" sz="1200" dirty="0">
+                      <a:latin typeface="Arial" panose="020B0604020202020204" pitchFamily="34" charset="0"/>
+                      <a:cs typeface="Arial" panose="020B0604020202020204" pitchFamily="34" charset="0"/>
+                    </a:rPr>
+                    <a:t>, </a:t>
+                  </a:r>
+                  <a:r>
+                    <a:rPr lang="en-CA" altLang="zh-CN" sz="1200" b="1" dirty="0">
+                      <a:latin typeface="Arial" panose="020B0604020202020204" pitchFamily="34" charset="0"/>
+                      <a:cs typeface="Arial" panose="020B0604020202020204" pitchFamily="34" charset="0"/>
+                    </a:rPr>
+                    <a:t>Pos</a:t>
+                  </a:r>
+                  <a:r>
+                    <a:rPr lang="en-CA" altLang="zh-CN" sz="1200" dirty="0">
+                      <a:latin typeface="Arial" panose="020B0604020202020204" pitchFamily="34" charset="0"/>
+                      <a:cs typeface="Arial" panose="020B0604020202020204" pitchFamily="34" charset="0"/>
+                    </a:rPr>
+                    <a:t>, </a:t>
+                  </a:r>
+                  <a:r>
+                    <a:rPr lang="en-CA" altLang="zh-CN" sz="1200" b="1" dirty="0">
+                      <a:latin typeface="Arial" panose="020B0604020202020204" pitchFamily="34" charset="0"/>
+                      <a:cs typeface="Arial" panose="020B0604020202020204" pitchFamily="34" charset="0"/>
+                    </a:rPr>
+                    <a:t>Ts</a:t>
+                  </a:r>
+                  <a:r>
+                    <a:rPr lang="en-CA" altLang="zh-CN" sz="1200" dirty="0">
+                      <a:latin typeface="Arial" panose="020B0604020202020204" pitchFamily="34" charset="0"/>
+                      <a:cs typeface="Arial" panose="020B0604020202020204" pitchFamily="34" charset="0"/>
+                    </a:rPr>
+                    <a:t>)</a:t>
+                  </a:r>
+                  <a:endParaRPr lang="en-US" sz="1200" dirty="0">
+                    <a:latin typeface="Arial" panose="020B0604020202020204" pitchFamily="34" charset="0"/>
+                    <a:cs typeface="Arial" panose="020B0604020202020204" pitchFamily="34" charset="0"/>
+                  </a:endParaRPr>
+                </a:p>
+              </p:txBody>
+            </p:sp>
+          </mc:Choice>
+          <mc:Fallback>
+            <p:sp>
+              <p:nvSpPr>
+                <p:cNvPr id="6" name="Rectangle: Rounded Corners 119">
+                  <a:extLst>
+                    <a:ext uri="{FF2B5EF4-FFF2-40B4-BE49-F238E27FC236}">
+                      <a16:creationId xmlns:a16="http://schemas.microsoft.com/office/drawing/2014/main" id="{55432864-FDC6-FC31-F7D8-8B2E274A0581}"/>
+                    </a:ext>
+                  </a:extLst>
+                </p:cNvPr>
+                <p:cNvSpPr>
+                  <a:spLocks noRot="1" noChangeAspect="1" noMove="1" noResize="1" noEditPoints="1" noAdjustHandles="1" noChangeArrowheads="1" noChangeShapeType="1" noTextEdit="1"/>
+                </p:cNvSpPr>
+                <p:nvPr/>
+              </p:nvSpPr>
+              <p:spPr>
+                <a:xfrm>
+                  <a:off x="4300103" y="1906051"/>
+                  <a:ext cx="2880908" cy="522888"/>
+                </a:xfrm>
+                <a:prstGeom prst="roundRect">
+                  <a:avLst/>
+                </a:prstGeom>
+                <a:blipFill>
+                  <a:blip r:embed="rId5"/>
+                  <a:stretch>
+                    <a:fillRect b="-5435"/>
+                  </a:stretch>
+                </a:blipFill>
+                <a:ln w="34925" cap="flat" cmpd="sng" algn="ctr">
+                  <a:solidFill>
+                    <a:sysClr val="windowText" lastClr="000000"/>
+                  </a:solidFill>
+                  <a:prstDash val="solid"/>
+                  <a:miter lim="800000"/>
+                </a:ln>
+                <a:effectLst/>
+              </p:spPr>
+              <p:txBody>
+                <a:bodyPr/>
+                <a:lstStyle/>
+                <a:p>
+                  <a:r>
+                    <a:rPr lang="en-CA">
+                      <a:noFill/>
+                    </a:rPr>
+                    <a:t> </a:t>
+                  </a:r>
+                </a:p>
+              </p:txBody>
+            </p:sp>
+          </mc:Fallback>
+        </mc:AlternateContent>
+        <mc:AlternateContent xmlns:mc="http://schemas.openxmlformats.org/markup-compatibility/2006" xmlns:a14="http://schemas.microsoft.com/office/drawing/2010/main">
+          <mc:Choice Requires="a14">
+            <p:sp>
+              <p:nvSpPr>
+                <p:cNvPr id="8" name="Rectangle: Rounded Corners 119">
+                  <a:extLst>
+                    <a:ext uri="{FF2B5EF4-FFF2-40B4-BE49-F238E27FC236}">
+                      <a16:creationId xmlns:a16="http://schemas.microsoft.com/office/drawing/2014/main" id="{F3CED45C-4FE0-E999-DE9D-927D43BA3E7A}"/>
+                    </a:ext>
+                  </a:extLst>
+                </p:cNvPr>
+                <p:cNvSpPr/>
+                <p:nvPr/>
+              </p:nvSpPr>
+              <p:spPr>
+                <a:xfrm>
+                  <a:off x="2024744" y="2558209"/>
+                  <a:ext cx="1812270" cy="521186"/>
+                </a:xfrm>
+                <a:prstGeom prst="roundRect">
+                  <a:avLst/>
+                </a:prstGeom>
+                <a:solidFill>
+                  <a:schemeClr val="accent2">
+                    <a:lumMod val="40000"/>
+                    <a:lumOff val="60000"/>
+                  </a:schemeClr>
+                </a:solidFill>
+                <a:ln w="34925" cap="flat" cmpd="sng" algn="ctr">
+                  <a:solidFill>
+                    <a:sysClr val="windowText" lastClr="000000"/>
+                  </a:solidFill>
+                  <a:prstDash val="solid"/>
+                  <a:miter lim="800000"/>
+                </a:ln>
+                <a:effectLst/>
+              </p:spPr>
+              <p:txBody>
+                <a:bodyPr rtlCol="0" anchor="ctr"/>
+                <a:lstStyle/>
+                <a:p>
+                  <a:pPr algn="ctr">
+                    <a:defRPr/>
+                  </a:pPr>
+                  <a:r>
+                    <a:rPr lang="en-CA" altLang="zh-CN" sz="1200" b="1" dirty="0">
+                      <a:latin typeface="Arial" panose="020B0604020202020204" pitchFamily="34" charset="0"/>
+                      <a:cs typeface="Arial" panose="020B0604020202020204" pitchFamily="34" charset="0"/>
+                    </a:rPr>
+                    <a:t>Observed Data:</a:t>
+                  </a:r>
+                  <a:r>
+                    <a:rPr lang="en-US" altLang="zh-CN" sz="1200" b="1" dirty="0">
+                      <a:latin typeface="Arial" panose="020B0604020202020204" pitchFamily="34" charset="0"/>
+                      <a:cs typeface="Arial" panose="020B0604020202020204" pitchFamily="34" charset="0"/>
+                    </a:rPr>
+                    <a:t> </a:t>
+                  </a:r>
+                </a:p>
+                <a:p>
+                  <a:pPr algn="ctr">
+                    <a:defRPr/>
+                  </a:pPr>
+                  <a14:m>
+                    <m:oMath xmlns:m="http://schemas.openxmlformats.org/officeDocument/2006/math">
+                      <m:sSup>
+                        <m:sSupPr>
+                          <m:ctrlPr>
+                            <a:rPr lang="en-CA" altLang="zh-CN" sz="1400" b="1" i="1" dirty="0">
+                              <a:latin typeface="Cambria Math" panose="02040503050406030204" pitchFamily="18" charset="0"/>
+                              <a:cs typeface="Arial" panose="020B0604020202020204" pitchFamily="34" charset="0"/>
+                            </a:rPr>
+                          </m:ctrlPr>
+                        </m:sSupPr>
+                        <m:e>
+                          <m:r>
+                            <a:rPr lang="en-US" altLang="zh-CN" sz="1400" b="1" i="1" dirty="0">
+                              <a:latin typeface="Cambria Math" panose="02040503050406030204" pitchFamily="18" charset="0"/>
+                              <a:cs typeface="Arial" panose="020B0604020202020204" pitchFamily="34" charset="0"/>
+                            </a:rPr>
+                            <m:t>𝑫</m:t>
+                          </m:r>
+                        </m:e>
+                        <m:sup>
+                          <m:r>
+                            <a:rPr lang="en-CA" altLang="zh-CN" sz="1400" b="1" i="1" dirty="0" smtClean="0">
+                              <a:latin typeface="Cambria Math" panose="02040503050406030204" pitchFamily="18" charset="0"/>
+                              <a:cs typeface="Arial" panose="020B0604020202020204" pitchFamily="34" charset="0"/>
+                            </a:rPr>
+                            <m:t>𝑴𝒆𝒂𝒔</m:t>
+                          </m:r>
+                        </m:sup>
+                      </m:sSup>
+                    </m:oMath>
+                  </a14:m>
+                  <a:r>
+                    <a:rPr lang="en-CA" altLang="zh-CN" sz="1400" b="1" dirty="0">
+                      <a:latin typeface="Arial" panose="020B0604020202020204" pitchFamily="34" charset="0"/>
+                      <a:cs typeface="Arial" panose="020B0604020202020204" pitchFamily="34" charset="0"/>
+                    </a:rPr>
+                    <a:t> </a:t>
+                  </a:r>
+                </a:p>
+              </p:txBody>
+            </p:sp>
+          </mc:Choice>
+          <mc:Fallback xmlns="">
+            <p:sp>
+              <p:nvSpPr>
+                <p:cNvPr id="8" name="Rectangle: Rounded Corners 119">
+                  <a:extLst>
+                    <a:ext uri="{FF2B5EF4-FFF2-40B4-BE49-F238E27FC236}">
+                      <a16:creationId xmlns:a16="http://schemas.microsoft.com/office/drawing/2014/main" id="{23CC2B04-9E93-74FA-41E7-32C9D701070C}"/>
+                    </a:ext>
+                  </a:extLst>
+                </p:cNvPr>
+                <p:cNvSpPr>
+                  <a:spLocks noRot="1" noChangeAspect="1" noMove="1" noResize="1" noEditPoints="1" noAdjustHandles="1" noChangeArrowheads="1" noChangeShapeType="1" noTextEdit="1"/>
+                </p:cNvSpPr>
+                <p:nvPr/>
+              </p:nvSpPr>
+              <p:spPr>
+                <a:xfrm>
+                  <a:off x="2024744" y="2558209"/>
+                  <a:ext cx="1812270" cy="521186"/>
+                </a:xfrm>
+                <a:prstGeom prst="roundRect">
+                  <a:avLst/>
+                </a:prstGeom>
+                <a:blipFill>
+                  <a:blip r:embed="rId6"/>
+                  <a:stretch>
+                    <a:fillRect/>
+                  </a:stretch>
+                </a:blipFill>
+                <a:ln w="34925" cap="flat" cmpd="sng" algn="ctr">
+                  <a:solidFill>
+                    <a:sysClr val="windowText" lastClr="000000"/>
+                  </a:solidFill>
+                  <a:prstDash val="solid"/>
+                  <a:miter lim="800000"/>
+                </a:ln>
+                <a:effectLst/>
+              </p:spPr>
+              <p:txBody>
+                <a:bodyPr/>
+                <a:lstStyle/>
+                <a:p>
+                  <a:r>
+                    <a:rPr lang="en-CA">
+                      <a:noFill/>
+                    </a:rPr>
+                    <a:t> </a:t>
+                  </a:r>
+                </a:p>
+              </p:txBody>
+            </p:sp>
+          </mc:Fallback>
+        </mc:AlternateContent>
+        <p:cxnSp>
+          <p:nvCxnSpPr>
+            <p:cNvPr id="10" name="Straight Arrow Connector 9">
+              <a:extLst>
+                <a:ext uri="{FF2B5EF4-FFF2-40B4-BE49-F238E27FC236}">
+                  <a16:creationId xmlns:a16="http://schemas.microsoft.com/office/drawing/2014/main" id="{A57ADF70-5FE7-FADC-847D-A49093A680D5}"/>
+                </a:ext>
+              </a:extLst>
+            </p:cNvPr>
+            <p:cNvCxnSpPr>
+              <a:cxnSpLocks/>
+            </p:cNvCxnSpPr>
+            <p:nvPr/>
+          </p:nvCxnSpPr>
+          <p:spPr>
+            <a:xfrm>
+              <a:off x="5747449" y="2426468"/>
+              <a:ext cx="2630" cy="263483"/>
+            </a:xfrm>
+            <a:prstGeom prst="straightConnector1">
+              <a:avLst/>
+            </a:prstGeom>
+            <a:ln w="28575">
+              <a:tailEnd type="triangle"/>
+            </a:ln>
+          </p:spPr>
+          <p:style>
+            <a:lnRef idx="2">
+              <a:schemeClr val="dk1"/>
+            </a:lnRef>
+            <a:fillRef idx="0">
+              <a:schemeClr val="dk1"/>
+            </a:fillRef>
+            <a:effectRef idx="1">
+              <a:schemeClr val="dk1"/>
+            </a:effectRef>
+            <a:fontRef idx="minor">
+              <a:schemeClr val="tx1"/>
+            </a:fontRef>
+          </p:style>
+        </p:cxnSp>
+        <mc:AlternateContent xmlns:mc="http://schemas.openxmlformats.org/markup-compatibility/2006" xmlns:a14="http://schemas.microsoft.com/office/drawing/2010/main">
+          <mc:Choice Requires="a14">
+            <p:sp>
+              <p:nvSpPr>
+                <p:cNvPr id="11" name="Rectangle: Rounded Corners 119">
+                  <a:extLst>
+                    <a:ext uri="{FF2B5EF4-FFF2-40B4-BE49-F238E27FC236}">
+                      <a16:creationId xmlns:a16="http://schemas.microsoft.com/office/drawing/2014/main" id="{565206DD-5F3A-D337-D8C0-37834C59D14A}"/>
+                    </a:ext>
+                  </a:extLst>
+                </p:cNvPr>
+                <p:cNvSpPr/>
+                <p:nvPr/>
+              </p:nvSpPr>
+              <p:spPr>
+                <a:xfrm>
+                  <a:off x="4319148" y="2682564"/>
+                  <a:ext cx="2861863" cy="574618"/>
+                </a:xfrm>
+                <a:prstGeom prst="roundRect">
+                  <a:avLst/>
+                </a:prstGeom>
+                <a:solidFill>
+                  <a:schemeClr val="accent6">
+                    <a:lumMod val="20000"/>
+                    <a:lumOff val="80000"/>
+                  </a:schemeClr>
+                </a:solidFill>
+                <a:ln w="34925" cap="flat" cmpd="sng" algn="ctr">
+                  <a:solidFill>
+                    <a:sysClr val="windowText" lastClr="000000"/>
+                  </a:solidFill>
+                  <a:prstDash val="solid"/>
+                  <a:miter lim="800000"/>
+                </a:ln>
+                <a:effectLst/>
+              </p:spPr>
+              <p:txBody>
+                <a:bodyPr rtlCol="0" anchor="ctr"/>
+                <a:lstStyle/>
+                <a:p>
+                  <a:pPr algn="ctr">
+                    <a:defRPr/>
+                  </a:pPr>
+                  <a:r>
+                    <a:rPr lang="en-US" altLang="zh-CN" sz="1400" b="1" dirty="0">
+                      <a:latin typeface="Arial" panose="020B0604020202020204" pitchFamily="34" charset="0"/>
+                      <a:cs typeface="Arial" panose="020B0604020202020204" pitchFamily="34" charset="0"/>
+                    </a:rPr>
+                    <a:t>Loss:</a:t>
+                  </a:r>
+                </a:p>
+                <a:p>
+                  <a:pPr algn="ctr">
+                    <a:defRPr/>
+                  </a:pPr>
+                  <a:r>
+                    <a:rPr lang="en-CA" altLang="zh-CN" sz="1200" dirty="0">
+                      <a:latin typeface="Arial" panose="020B0604020202020204" pitchFamily="34" charset="0"/>
+                      <a:cs typeface="Arial" panose="020B0604020202020204" pitchFamily="34" charset="0"/>
+                    </a:rPr>
+                    <a:t>MSE =</a:t>
+                  </a:r>
+                  <a14:m>
+                    <m:oMath xmlns:m="http://schemas.openxmlformats.org/officeDocument/2006/math">
+                      <m:f>
+                        <m:fPr>
+                          <m:ctrlPr>
+                            <a:rPr lang="en-CA" altLang="zh-CN" sz="1200" i="1" smtClean="0">
+                              <a:latin typeface="Cambria Math" panose="02040503050406030204" pitchFamily="18" charset="0"/>
+                              <a:cs typeface="Arial" panose="020B0604020202020204" pitchFamily="34" charset="0"/>
+                            </a:rPr>
+                          </m:ctrlPr>
+                        </m:fPr>
+                        <m:num>
+                          <m:r>
+                            <a:rPr lang="en-CA" altLang="zh-CN" sz="1200" b="0" i="1" smtClean="0">
+                              <a:latin typeface="Cambria Math" panose="02040503050406030204" pitchFamily="18" charset="0"/>
+                              <a:cs typeface="Arial" panose="020B0604020202020204" pitchFamily="34" charset="0"/>
+                            </a:rPr>
+                            <m:t>1</m:t>
+                          </m:r>
+                        </m:num>
+                        <m:den>
+                          <m:sSub>
+                            <m:sSubPr>
+                              <m:ctrlPr>
+                                <a:rPr lang="en-CA" altLang="zh-CN" sz="1200" i="1" smtClean="0">
+                                  <a:latin typeface="Cambria Math" panose="02040503050406030204" pitchFamily="18" charset="0"/>
+                                  <a:cs typeface="Arial" panose="020B0604020202020204" pitchFamily="34" charset="0"/>
+                                </a:rPr>
+                              </m:ctrlPr>
+                            </m:sSubPr>
+                            <m:e>
+                              <m:r>
+                                <a:rPr lang="en-CA" altLang="zh-CN" sz="1200" b="0" i="1" smtClean="0">
+                                  <a:latin typeface="Cambria Math" panose="02040503050406030204" pitchFamily="18" charset="0"/>
+                                  <a:cs typeface="Arial" panose="020B0604020202020204" pitchFamily="34" charset="0"/>
+                                </a:rPr>
+                                <m:t>𝑁</m:t>
+                              </m:r>
+                            </m:e>
+                            <m:sub>
+                              <m:r>
+                                <a:rPr lang="en-CA" altLang="zh-CN" sz="1200" b="0" i="1" smtClean="0">
+                                  <a:latin typeface="Cambria Math" panose="02040503050406030204" pitchFamily="18" charset="0"/>
+                                  <a:cs typeface="Arial" panose="020B0604020202020204" pitchFamily="34" charset="0"/>
+                                </a:rPr>
+                                <m:t>𝑠</m:t>
+                              </m:r>
+                            </m:sub>
+                          </m:sSub>
+                          <m:sSub>
+                            <m:sSubPr>
+                              <m:ctrlPr>
+                                <a:rPr lang="en-CA" altLang="zh-CN" sz="1200" i="1" smtClean="0">
+                                  <a:latin typeface="Cambria Math" panose="02040503050406030204" pitchFamily="18" charset="0"/>
+                                  <a:cs typeface="Arial" panose="020B0604020202020204" pitchFamily="34" charset="0"/>
+                                </a:rPr>
+                              </m:ctrlPr>
+                            </m:sSubPr>
+                            <m:e>
+                              <m:r>
+                                <a:rPr lang="en-CA" altLang="zh-CN" sz="1200" b="0" i="1" smtClean="0">
+                                  <a:latin typeface="Cambria Math" panose="02040503050406030204" pitchFamily="18" charset="0"/>
+                                  <a:cs typeface="Arial" panose="020B0604020202020204" pitchFamily="34" charset="0"/>
+                                </a:rPr>
+                                <m:t>𝑁</m:t>
+                              </m:r>
+                            </m:e>
+                            <m:sub>
+                              <m:r>
+                                <a:rPr lang="en-CA" altLang="zh-CN" sz="1200" b="0" i="1" smtClean="0">
+                                  <a:latin typeface="Cambria Math" panose="02040503050406030204" pitchFamily="18" charset="0"/>
+                                  <a:cs typeface="Arial" panose="020B0604020202020204" pitchFamily="34" charset="0"/>
+                                </a:rPr>
+                                <m:t>𝑡</m:t>
+                              </m:r>
+                            </m:sub>
+                          </m:sSub>
+                        </m:den>
+                      </m:f>
+                      <m:nary>
+                        <m:naryPr>
+                          <m:chr m:val="∑"/>
+                          <m:limLoc m:val="subSup"/>
+                          <m:ctrlPr>
+                            <a:rPr lang="en-CA" altLang="zh-CN" sz="1200" i="1" smtClean="0">
+                              <a:latin typeface="Cambria Math" panose="02040503050406030204" pitchFamily="18" charset="0"/>
+                              <a:cs typeface="Arial" panose="020B0604020202020204" pitchFamily="34" charset="0"/>
+                            </a:rPr>
+                          </m:ctrlPr>
+                        </m:naryPr>
+                        <m:sub>
+                          <m:r>
+                            <m:rPr>
+                              <m:brk m:alnAt="25"/>
+                            </m:rPr>
+                            <a:rPr lang="en-CA" altLang="zh-CN" sz="1200" b="0" i="1" smtClean="0">
+                              <a:latin typeface="Cambria Math" panose="02040503050406030204" pitchFamily="18" charset="0"/>
+                              <a:cs typeface="Arial" panose="020B0604020202020204" pitchFamily="34" charset="0"/>
+                            </a:rPr>
+                            <m:t>𝑖</m:t>
+                          </m:r>
+                          <m:r>
+                            <a:rPr lang="en-CA" altLang="zh-CN" sz="1200" b="0" i="1" smtClean="0">
+                              <a:latin typeface="Cambria Math" panose="02040503050406030204" pitchFamily="18" charset="0"/>
+                              <a:cs typeface="Arial" panose="020B0604020202020204" pitchFamily="34" charset="0"/>
+                            </a:rPr>
+                            <m:t>=1</m:t>
+                          </m:r>
+                        </m:sub>
+                        <m:sup>
+                          <m:sSub>
+                            <m:sSubPr>
+                              <m:ctrlPr>
+                                <a:rPr lang="en-CA" altLang="zh-CN" sz="1200" i="1">
+                                  <a:latin typeface="Cambria Math" panose="02040503050406030204" pitchFamily="18" charset="0"/>
+                                  <a:cs typeface="Arial" panose="020B0604020202020204" pitchFamily="34" charset="0"/>
+                                </a:rPr>
+                              </m:ctrlPr>
+                            </m:sSubPr>
+                            <m:e>
+                              <m:r>
+                                <a:rPr lang="en-CA" altLang="zh-CN" sz="1200" i="1">
+                                  <a:latin typeface="Cambria Math" panose="02040503050406030204" pitchFamily="18" charset="0"/>
+                                  <a:cs typeface="Arial" panose="020B0604020202020204" pitchFamily="34" charset="0"/>
+                                </a:rPr>
+                                <m:t>𝑁</m:t>
+                              </m:r>
+                            </m:e>
+                            <m:sub>
+                              <m:r>
+                                <a:rPr lang="en-CA" altLang="zh-CN" sz="1200" i="1">
+                                  <a:latin typeface="Cambria Math" panose="02040503050406030204" pitchFamily="18" charset="0"/>
+                                  <a:cs typeface="Arial" panose="020B0604020202020204" pitchFamily="34" charset="0"/>
+                                </a:rPr>
+                                <m:t>𝑠</m:t>
+                              </m:r>
+                            </m:sub>
+                          </m:sSub>
+                        </m:sup>
+                        <m:e>
+                          <m:nary>
+                            <m:naryPr>
+                              <m:chr m:val="∑"/>
+                              <m:ctrlPr>
+                                <a:rPr lang="en-CA" altLang="zh-CN" sz="1200" i="1" smtClean="0">
+                                  <a:latin typeface="Cambria Math" panose="02040503050406030204" pitchFamily="18" charset="0"/>
+                                  <a:cs typeface="Arial" panose="020B0604020202020204" pitchFamily="34" charset="0"/>
+                                </a:rPr>
+                              </m:ctrlPr>
+                            </m:naryPr>
+                            <m:sub>
+                              <m:r>
+                                <m:rPr>
+                                  <m:brk m:alnAt="23"/>
+                                </m:rPr>
+                                <a:rPr lang="en-CA" altLang="zh-CN" sz="1200" b="0" i="1" smtClean="0">
+                                  <a:latin typeface="Cambria Math" panose="02040503050406030204" pitchFamily="18" charset="0"/>
+                                  <a:cs typeface="Arial" panose="020B0604020202020204" pitchFamily="34" charset="0"/>
+                                </a:rPr>
+                                <m:t>𝑗</m:t>
+                              </m:r>
+                              <m:r>
+                                <a:rPr lang="en-CA" altLang="zh-CN" sz="1200" i="1">
+                                  <a:latin typeface="Cambria Math" panose="02040503050406030204" pitchFamily="18" charset="0"/>
+                                  <a:cs typeface="Arial" panose="020B0604020202020204" pitchFamily="34" charset="0"/>
+                                </a:rPr>
+                                <m:t>=1</m:t>
+                              </m:r>
+                            </m:sub>
+                            <m:sup>
+                              <m:sSub>
+                                <m:sSubPr>
+                                  <m:ctrlPr>
+                                    <a:rPr lang="en-CA" altLang="zh-CN" sz="1200" i="1">
+                                      <a:latin typeface="Cambria Math" panose="02040503050406030204" pitchFamily="18" charset="0"/>
+                                      <a:cs typeface="Arial" panose="020B0604020202020204" pitchFamily="34" charset="0"/>
+                                    </a:rPr>
+                                  </m:ctrlPr>
+                                </m:sSubPr>
+                                <m:e>
+                                  <m:r>
+                                    <a:rPr lang="en-CA" altLang="zh-CN" sz="1200" i="1">
+                                      <a:latin typeface="Cambria Math" panose="02040503050406030204" pitchFamily="18" charset="0"/>
+                                      <a:cs typeface="Arial" panose="020B0604020202020204" pitchFamily="34" charset="0"/>
+                                    </a:rPr>
+                                    <m:t>𝑁</m:t>
+                                  </m:r>
+                                </m:e>
+                                <m:sub>
+                                  <m:r>
+                                    <a:rPr lang="en-CA" altLang="zh-CN" sz="1200" b="0" i="1" smtClean="0">
+                                      <a:latin typeface="Cambria Math" panose="02040503050406030204" pitchFamily="18" charset="0"/>
+                                      <a:cs typeface="Arial" panose="020B0604020202020204" pitchFamily="34" charset="0"/>
+                                    </a:rPr>
+                                    <m:t>𝑡</m:t>
+                                  </m:r>
+                                </m:sub>
+                              </m:sSub>
+                            </m:sup>
+                            <m:e>
+                              <m:sSup>
+                                <m:sSupPr>
+                                  <m:ctrlPr>
+                                    <a:rPr lang="en-CA" altLang="zh-CN" sz="1200" i="1" smtClean="0">
+                                      <a:latin typeface="Cambria Math" panose="02040503050406030204" pitchFamily="18" charset="0"/>
+                                      <a:cs typeface="Arial" panose="020B0604020202020204" pitchFamily="34" charset="0"/>
+                                    </a:rPr>
+                                  </m:ctrlPr>
+                                </m:sSupPr>
+                                <m:e>
+                                  <m:r>
+                                    <a:rPr lang="en-CA" altLang="zh-CN" sz="1200" i="1">
+                                      <a:latin typeface="Cambria Math" panose="02040503050406030204" pitchFamily="18" charset="0"/>
+                                      <a:cs typeface="Arial" panose="020B0604020202020204" pitchFamily="34" charset="0"/>
+                                    </a:rPr>
+                                    <m:t>|</m:t>
+                                  </m:r>
+                                  <m:sSubSup>
+                                    <m:sSubSupPr>
+                                      <m:ctrlPr>
+                                        <a:rPr lang="en-CA" altLang="zh-CN" sz="1200" i="1">
+                                          <a:latin typeface="Cambria Math" panose="02040503050406030204" pitchFamily="18" charset="0"/>
+                                          <a:cs typeface="Arial" panose="020B0604020202020204" pitchFamily="34" charset="0"/>
+                                        </a:rPr>
+                                      </m:ctrlPr>
+                                    </m:sSubSupPr>
+                                    <m:e>
+                                      <m:r>
+                                        <a:rPr lang="en-CA" altLang="zh-CN" sz="1200" i="1">
+                                          <a:latin typeface="Cambria Math" panose="02040503050406030204" pitchFamily="18" charset="0"/>
+                                          <a:cs typeface="Arial" panose="020B0604020202020204" pitchFamily="34" charset="0"/>
+                                        </a:rPr>
+                                        <m:t>𝐷</m:t>
+                                      </m:r>
+                                    </m:e>
+                                    <m:sub>
+                                      <m:r>
+                                        <a:rPr lang="en-CA" altLang="zh-CN" sz="1200" i="1">
+                                          <a:latin typeface="Cambria Math" panose="02040503050406030204" pitchFamily="18" charset="0"/>
+                                          <a:cs typeface="Arial" panose="020B0604020202020204" pitchFamily="34" charset="0"/>
+                                        </a:rPr>
+                                        <m:t>𝑖</m:t>
+                                      </m:r>
+                                      <m:r>
+                                        <a:rPr lang="en-CA" altLang="zh-CN" sz="1200" i="1">
+                                          <a:latin typeface="Cambria Math" panose="02040503050406030204" pitchFamily="18" charset="0"/>
+                                          <a:cs typeface="Arial" panose="020B0604020202020204" pitchFamily="34" charset="0"/>
+                                        </a:rPr>
+                                        <m:t>,</m:t>
+                                      </m:r>
+                                      <m:r>
+                                        <a:rPr lang="en-CA" altLang="zh-CN" sz="1200" i="1">
+                                          <a:latin typeface="Cambria Math" panose="02040503050406030204" pitchFamily="18" charset="0"/>
+                                          <a:cs typeface="Arial" panose="020B0604020202020204" pitchFamily="34" charset="0"/>
+                                        </a:rPr>
+                                        <m:t>𝑗</m:t>
+                                      </m:r>
+                                    </m:sub>
+                                    <m:sup>
+                                      <m:r>
+                                        <a:rPr lang="en-CA" altLang="zh-CN" sz="1200" i="1">
+                                          <a:latin typeface="Cambria Math" panose="02040503050406030204" pitchFamily="18" charset="0"/>
+                                          <a:cs typeface="Arial" panose="020B0604020202020204" pitchFamily="34" charset="0"/>
+                                        </a:rPr>
+                                        <m:t>𝑆𝑖𝑚</m:t>
+                                      </m:r>
+                                    </m:sup>
+                                  </m:sSubSup>
+                                  <m:r>
+                                    <a:rPr lang="en-CA" altLang="zh-CN" sz="1200" i="1">
+                                      <a:latin typeface="Cambria Math" panose="02040503050406030204" pitchFamily="18" charset="0"/>
+                                      <a:cs typeface="Arial" panose="020B0604020202020204" pitchFamily="34" charset="0"/>
+                                    </a:rPr>
+                                    <m:t>−</m:t>
+                                  </m:r>
+                                  <m:sSubSup>
+                                    <m:sSubSupPr>
+                                      <m:ctrlPr>
+                                        <a:rPr lang="en-CA" altLang="zh-CN" sz="1200" i="1">
+                                          <a:latin typeface="Cambria Math" panose="02040503050406030204" pitchFamily="18" charset="0"/>
+                                          <a:cs typeface="Arial" panose="020B0604020202020204" pitchFamily="34" charset="0"/>
+                                        </a:rPr>
+                                      </m:ctrlPr>
+                                    </m:sSubSupPr>
+                                    <m:e>
+                                      <m:r>
+                                        <a:rPr lang="en-CA" altLang="zh-CN" sz="1200" i="1">
+                                          <a:latin typeface="Cambria Math" panose="02040503050406030204" pitchFamily="18" charset="0"/>
+                                          <a:cs typeface="Arial" panose="020B0604020202020204" pitchFamily="34" charset="0"/>
+                                        </a:rPr>
+                                        <m:t>𝐷</m:t>
+                                      </m:r>
+                                    </m:e>
+                                    <m:sub>
+                                      <m:r>
+                                        <a:rPr lang="en-CA" altLang="zh-CN" sz="1200" i="1">
+                                          <a:latin typeface="Cambria Math" panose="02040503050406030204" pitchFamily="18" charset="0"/>
+                                          <a:cs typeface="Arial" panose="020B0604020202020204" pitchFamily="34" charset="0"/>
+                                        </a:rPr>
+                                        <m:t>𝑖</m:t>
+                                      </m:r>
+                                      <m:r>
+                                        <a:rPr lang="en-CA" altLang="zh-CN" sz="1200" i="1">
+                                          <a:latin typeface="Cambria Math" panose="02040503050406030204" pitchFamily="18" charset="0"/>
+                                          <a:cs typeface="Arial" panose="020B0604020202020204" pitchFamily="34" charset="0"/>
+                                        </a:rPr>
+                                        <m:t>,</m:t>
+                                      </m:r>
+                                      <m:r>
+                                        <a:rPr lang="en-CA" altLang="zh-CN" sz="1200" i="1">
+                                          <a:latin typeface="Cambria Math" panose="02040503050406030204" pitchFamily="18" charset="0"/>
+                                          <a:cs typeface="Arial" panose="020B0604020202020204" pitchFamily="34" charset="0"/>
+                                        </a:rPr>
+                                        <m:t>𝑗</m:t>
+                                      </m:r>
+                                    </m:sub>
+                                    <m:sup>
+                                      <m:r>
+                                        <a:rPr lang="en-CA" altLang="zh-CN" sz="1200" i="1">
+                                          <a:latin typeface="Cambria Math" panose="02040503050406030204" pitchFamily="18" charset="0"/>
+                                          <a:cs typeface="Arial" panose="020B0604020202020204" pitchFamily="34" charset="0"/>
+                                        </a:rPr>
+                                        <m:t>𝑀𝑒𝑎𝑠</m:t>
+                                      </m:r>
+                                    </m:sup>
+                                  </m:sSubSup>
+                                  <m:r>
+                                    <a:rPr lang="en-CA" altLang="zh-CN" sz="1200" b="0" i="1" smtClean="0">
+                                      <a:latin typeface="Cambria Math" panose="02040503050406030204" pitchFamily="18" charset="0"/>
+                                      <a:cs typeface="Arial" panose="020B0604020202020204" pitchFamily="34" charset="0"/>
+                                    </a:rPr>
+                                    <m:t>|</m:t>
+                                  </m:r>
+                                </m:e>
+                                <m:sup>
+                                  <m:r>
+                                    <a:rPr lang="en-CA" altLang="zh-CN" sz="1200" b="0" i="1" smtClean="0">
+                                      <a:latin typeface="Cambria Math" panose="02040503050406030204" pitchFamily="18" charset="0"/>
+                                      <a:cs typeface="Arial" panose="020B0604020202020204" pitchFamily="34" charset="0"/>
+                                    </a:rPr>
+                                    <m:t>2</m:t>
+                                  </m:r>
+                                </m:sup>
+                              </m:sSup>
+                            </m:e>
+                          </m:nary>
+                        </m:e>
+                      </m:nary>
+                    </m:oMath>
+                  </a14:m>
+                  <a:endParaRPr lang="en-US" sz="1200" dirty="0">
+                    <a:latin typeface="Arial" panose="020B0604020202020204" pitchFamily="34" charset="0"/>
+                    <a:cs typeface="Arial" panose="020B0604020202020204" pitchFamily="34" charset="0"/>
+                  </a:endParaRPr>
+                </a:p>
+              </p:txBody>
+            </p:sp>
+          </mc:Choice>
+          <mc:Fallback xmlns="">
+            <p:sp>
+              <p:nvSpPr>
+                <p:cNvPr id="11" name="Rectangle: Rounded Corners 119">
+                  <a:extLst>
+                    <a:ext uri="{FF2B5EF4-FFF2-40B4-BE49-F238E27FC236}">
+                      <a16:creationId xmlns:a16="http://schemas.microsoft.com/office/drawing/2014/main" id="{5B535614-7B5B-9F0F-376D-051A8A3A62D3}"/>
+                    </a:ext>
+                  </a:extLst>
+                </p:cNvPr>
+                <p:cNvSpPr>
+                  <a:spLocks noRot="1" noChangeAspect="1" noMove="1" noResize="1" noEditPoints="1" noAdjustHandles="1" noChangeArrowheads="1" noChangeShapeType="1" noTextEdit="1"/>
+                </p:cNvSpPr>
+                <p:nvPr/>
+              </p:nvSpPr>
+              <p:spPr>
+                <a:xfrm>
+                  <a:off x="4319148" y="2682564"/>
+                  <a:ext cx="2861863" cy="574618"/>
+                </a:xfrm>
+                <a:prstGeom prst="roundRect">
+                  <a:avLst/>
+                </a:prstGeom>
+                <a:blipFill>
+                  <a:blip r:embed="rId7"/>
+                  <a:stretch>
+                    <a:fillRect t="-1000" b="-61000"/>
+                  </a:stretch>
+                </a:blipFill>
+                <a:ln w="34925" cap="flat" cmpd="sng" algn="ctr">
+                  <a:solidFill>
+                    <a:sysClr val="windowText" lastClr="000000"/>
+                  </a:solidFill>
+                  <a:prstDash val="solid"/>
+                  <a:miter lim="800000"/>
+                </a:ln>
+                <a:effectLst/>
+              </p:spPr>
+              <p:txBody>
+                <a:bodyPr/>
+                <a:lstStyle/>
+                <a:p>
+                  <a:r>
+                    <a:rPr lang="en-CA">
+                      <a:noFill/>
+                    </a:rPr>
+                    <a:t> </a:t>
+                  </a:r>
+                </a:p>
+              </p:txBody>
+            </p:sp>
+          </mc:Fallback>
+        </mc:AlternateContent>
+        <p:sp>
+          <p:nvSpPr>
+            <p:cNvPr id="12" name="Diamond 11">
+              <a:extLst>
+                <a:ext uri="{FF2B5EF4-FFF2-40B4-BE49-F238E27FC236}">
+                  <a16:creationId xmlns:a16="http://schemas.microsoft.com/office/drawing/2014/main" id="{29D33C8A-3BED-F568-14B7-998F63FDB448}"/>
+                </a:ext>
+              </a:extLst>
+            </p:cNvPr>
+            <p:cNvSpPr/>
+            <p:nvPr/>
+          </p:nvSpPr>
+          <p:spPr>
+            <a:xfrm>
+              <a:off x="4323678" y="3510807"/>
+              <a:ext cx="2847542" cy="506022"/>
+            </a:xfrm>
+            <a:prstGeom prst="diamond">
+              <a:avLst/>
+            </a:prstGeom>
+            <a:solidFill>
+              <a:schemeClr val="accent4">
+                <a:lumMod val="20000"/>
+                <a:lumOff val="80000"/>
+              </a:schemeClr>
+            </a:solidFill>
+            <a:ln w="25400"/>
+          </p:spPr>
+          <p:style>
+            <a:lnRef idx="2">
+              <a:schemeClr val="dk1"/>
+            </a:lnRef>
+            <a:fillRef idx="1">
+              <a:schemeClr val="lt1"/>
+            </a:fillRef>
+            <a:effectRef idx="0">
+              <a:schemeClr val="dk1"/>
+            </a:effectRef>
+            <a:fontRef idx="minor">
+              <a:schemeClr val="dk1"/>
+            </a:fontRef>
+          </p:style>
+          <p:txBody>
+            <a:bodyPr rtlCol="0" anchor="ctr"/>
+            <a:lstStyle/>
+            <a:p>
+              <a:pPr algn="ctr"/>
+              <a:r>
+                <a:rPr lang="en-CA" sz="1400" dirty="0">
+                  <a:latin typeface="Arial" panose="020B0604020202020204" pitchFamily="34" charset="0"/>
+                  <a:cs typeface="Arial" panose="020B0604020202020204" pitchFamily="34" charset="0"/>
+                </a:rPr>
+                <a:t>Convergent?</a:t>
+              </a:r>
+            </a:p>
+          </p:txBody>
+        </p:sp>
+        <p:cxnSp>
+          <p:nvCxnSpPr>
+            <p:cNvPr id="15" name="Straight Arrow Connector 14">
+              <a:extLst>
+                <a:ext uri="{FF2B5EF4-FFF2-40B4-BE49-F238E27FC236}">
+                  <a16:creationId xmlns:a16="http://schemas.microsoft.com/office/drawing/2014/main" id="{5F81A4C3-3577-D1DC-3352-B7B2AF85E10C}"/>
+                </a:ext>
+              </a:extLst>
+            </p:cNvPr>
+            <p:cNvCxnSpPr>
+              <a:cxnSpLocks/>
+            </p:cNvCxnSpPr>
+            <p:nvPr/>
+          </p:nvCxnSpPr>
+          <p:spPr>
+            <a:xfrm>
+              <a:off x="5737927" y="1629920"/>
+              <a:ext cx="2630" cy="263483"/>
+            </a:xfrm>
+            <a:prstGeom prst="straightConnector1">
+              <a:avLst/>
+            </a:prstGeom>
+            <a:ln w="28575">
+              <a:tailEnd type="triangle"/>
+            </a:ln>
+          </p:spPr>
+          <p:style>
+            <a:lnRef idx="2">
+              <a:schemeClr val="dk1"/>
+            </a:lnRef>
+            <a:fillRef idx="0">
+              <a:schemeClr val="dk1"/>
+            </a:fillRef>
+            <a:effectRef idx="1">
+              <a:schemeClr val="dk1"/>
+            </a:effectRef>
+            <a:fontRef idx="minor">
+              <a:schemeClr val="tx1"/>
+            </a:fontRef>
+          </p:style>
+        </p:cxnSp>
+        <p:cxnSp>
+          <p:nvCxnSpPr>
+            <p:cNvPr id="16" name="Straight Arrow Connector 15">
+              <a:extLst>
+                <a:ext uri="{FF2B5EF4-FFF2-40B4-BE49-F238E27FC236}">
+                  <a16:creationId xmlns:a16="http://schemas.microsoft.com/office/drawing/2014/main" id="{6251EFD8-66E7-29C4-1A86-8E501DCEB19F}"/>
+                </a:ext>
+              </a:extLst>
+            </p:cNvPr>
+            <p:cNvCxnSpPr>
+              <a:cxnSpLocks/>
+            </p:cNvCxnSpPr>
+            <p:nvPr/>
+          </p:nvCxnSpPr>
+          <p:spPr>
+            <a:xfrm>
+              <a:off x="5757240" y="3257182"/>
+              <a:ext cx="2630" cy="263483"/>
+            </a:xfrm>
+            <a:prstGeom prst="straightConnector1">
+              <a:avLst/>
+            </a:prstGeom>
+            <a:ln w="28575">
+              <a:tailEnd type="triangle"/>
+            </a:ln>
+          </p:spPr>
+          <p:style>
+            <a:lnRef idx="2">
+              <a:schemeClr val="dk1"/>
+            </a:lnRef>
+            <a:fillRef idx="0">
+              <a:schemeClr val="dk1"/>
+            </a:fillRef>
+            <a:effectRef idx="1">
+              <a:schemeClr val="dk1"/>
+            </a:effectRef>
+            <a:fontRef idx="minor">
+              <a:schemeClr val="tx1"/>
+            </a:fontRef>
+          </p:style>
+        </p:cxnSp>
+        <p:cxnSp>
+          <p:nvCxnSpPr>
+            <p:cNvPr id="17" name="Straight Arrow Connector 16">
+              <a:extLst>
+                <a:ext uri="{FF2B5EF4-FFF2-40B4-BE49-F238E27FC236}">
+                  <a16:creationId xmlns:a16="http://schemas.microsoft.com/office/drawing/2014/main" id="{5BF62B24-044C-66C8-1A8C-FABC37DF5565}"/>
+                </a:ext>
+              </a:extLst>
+            </p:cNvPr>
+            <p:cNvCxnSpPr>
+              <a:cxnSpLocks/>
+            </p:cNvCxnSpPr>
+            <p:nvPr/>
+          </p:nvCxnSpPr>
+          <p:spPr>
+            <a:xfrm>
+              <a:off x="5759139" y="4016829"/>
+              <a:ext cx="2630" cy="263483"/>
+            </a:xfrm>
+            <a:prstGeom prst="straightConnector1">
+              <a:avLst/>
+            </a:prstGeom>
+            <a:ln w="28575">
+              <a:tailEnd type="triangle"/>
+            </a:ln>
+          </p:spPr>
+          <p:style>
+            <a:lnRef idx="2">
+              <a:schemeClr val="dk1"/>
+            </a:lnRef>
+            <a:fillRef idx="0">
+              <a:schemeClr val="dk1"/>
+            </a:fillRef>
+            <a:effectRef idx="1">
+              <a:schemeClr val="dk1"/>
+            </a:effectRef>
+            <a:fontRef idx="minor">
+              <a:schemeClr val="tx1"/>
+            </a:fontRef>
+          </p:style>
+        </p:cxnSp>
+        <p:sp>
+          <p:nvSpPr>
+            <p:cNvPr id="18" name="Rectangle: Rounded Corners 119">
+              <a:extLst>
+                <a:ext uri="{FF2B5EF4-FFF2-40B4-BE49-F238E27FC236}">
+                  <a16:creationId xmlns:a16="http://schemas.microsoft.com/office/drawing/2014/main" id="{D7F7AA3C-7210-8B26-5455-1B1C3980FF15}"/>
+                </a:ext>
+              </a:extLst>
+            </p:cNvPr>
+            <p:cNvSpPr/>
+            <p:nvPr/>
+          </p:nvSpPr>
+          <p:spPr>
+            <a:xfrm>
+              <a:off x="4330838" y="4272925"/>
+              <a:ext cx="2861863" cy="574618"/>
+            </a:xfrm>
+            <a:prstGeom prst="roundRect">
+              <a:avLst/>
+            </a:prstGeom>
+            <a:solidFill>
+              <a:schemeClr val="accent4">
+                <a:lumMod val="60000"/>
+                <a:lumOff val="40000"/>
+              </a:schemeClr>
+            </a:solidFill>
+            <a:ln w="34925" cap="flat" cmpd="sng" algn="ctr">
+              <a:solidFill>
+                <a:sysClr val="windowText" lastClr="000000"/>
+              </a:solidFill>
+              <a:prstDash val="solid"/>
+              <a:miter lim="800000"/>
+            </a:ln>
+            <a:effectLst/>
+          </p:spPr>
+          <p:txBody>
+            <a:bodyPr rtlCol="0" anchor="ctr"/>
+            <a:lstStyle/>
+            <a:p>
+              <a:pPr algn="ctr">
+                <a:defRPr/>
+              </a:pPr>
+              <a:r>
+                <a:rPr lang="en-US" altLang="zh-CN" sz="1400" b="1" i="1" dirty="0">
+                  <a:latin typeface="Arial" panose="020B0604020202020204" pitchFamily="34" charset="0"/>
+                  <a:cs typeface="Arial" panose="020B0604020202020204" pitchFamily="34" charset="0"/>
+                </a:rPr>
+                <a:t>Para</a:t>
+              </a:r>
+              <a:r>
+                <a:rPr lang="en-CA" altLang="zh-CN" sz="1400" b="1" i="1" dirty="0" err="1">
+                  <a:latin typeface="Arial" panose="020B0604020202020204" pitchFamily="34" charset="0"/>
+                  <a:cs typeface="Arial" panose="020B0604020202020204" pitchFamily="34" charset="0"/>
+                </a:rPr>
+                <a:t>ms</a:t>
+              </a:r>
+              <a:r>
+                <a:rPr lang="en-CA" altLang="zh-CN" sz="1400" b="1" i="1" dirty="0">
+                  <a:latin typeface="Arial" panose="020B0604020202020204" pitchFamily="34" charset="0"/>
+                  <a:cs typeface="Arial" panose="020B0604020202020204" pitchFamily="34" charset="0"/>
+                </a:rPr>
+                <a:t> </a:t>
+              </a:r>
+              <a:r>
+                <a:rPr lang="en-CA" altLang="zh-CN" sz="1400" b="1" dirty="0">
+                  <a:latin typeface="Arial" panose="020B0604020202020204" pitchFamily="34" charset="0"/>
+                  <a:cs typeface="Arial" panose="020B0604020202020204" pitchFamily="34" charset="0"/>
+                </a:rPr>
+                <a:t>updating </a:t>
+              </a:r>
+            </a:p>
+            <a:p>
+              <a:pPr algn="ctr">
+                <a:defRPr/>
+              </a:pPr>
+              <a:r>
+                <a:rPr lang="en-CA" altLang="zh-CN" sz="1400" dirty="0">
+                  <a:latin typeface="Arial" panose="020B0604020202020204" pitchFamily="34" charset="0"/>
+                  <a:cs typeface="Arial" panose="020B0604020202020204" pitchFamily="34" charset="0"/>
+                </a:rPr>
+                <a:t>by the</a:t>
+              </a:r>
+              <a:r>
+                <a:rPr lang="en-CA" altLang="zh-CN" sz="1400" b="1" dirty="0">
+                  <a:latin typeface="Arial" panose="020B0604020202020204" pitchFamily="34" charset="0"/>
+                  <a:cs typeface="Arial" panose="020B0604020202020204" pitchFamily="34" charset="0"/>
+                </a:rPr>
+                <a:t> </a:t>
+              </a:r>
+              <a:r>
+                <a:rPr lang="en-CA" sz="1200" b="1" dirty="0">
+                  <a:latin typeface="Arial" panose="020B0604020202020204" pitchFamily="34" charset="0"/>
+                  <a:cs typeface="Arial" panose="020B0604020202020204" pitchFamily="34" charset="0"/>
+                </a:rPr>
+                <a:t>L-BFGS-B</a:t>
+              </a:r>
+              <a:r>
+                <a:rPr lang="en-CA" sz="1200" dirty="0">
+                  <a:latin typeface="Arial" panose="020B0604020202020204" pitchFamily="34" charset="0"/>
+                  <a:cs typeface="Arial" panose="020B0604020202020204" pitchFamily="34" charset="0"/>
+                </a:rPr>
+                <a:t> algorithm</a:t>
+              </a:r>
+              <a:endParaRPr lang="en-US" sz="1200" dirty="0">
+                <a:latin typeface="Arial" panose="020B0604020202020204" pitchFamily="34" charset="0"/>
+                <a:cs typeface="Arial" panose="020B0604020202020204" pitchFamily="34" charset="0"/>
+              </a:endParaRPr>
+            </a:p>
+          </p:txBody>
+        </p:sp>
+        <p:cxnSp>
+          <p:nvCxnSpPr>
+            <p:cNvPr id="24" name="Connector: Elbow 23">
+              <a:extLst>
+                <a:ext uri="{FF2B5EF4-FFF2-40B4-BE49-F238E27FC236}">
+                  <a16:creationId xmlns:a16="http://schemas.microsoft.com/office/drawing/2014/main" id="{6B955786-3ACA-FE64-3B3F-35AD38400B10}"/>
+                </a:ext>
+              </a:extLst>
+            </p:cNvPr>
+            <p:cNvCxnSpPr>
+              <a:stCxn id="18" idx="3"/>
+              <a:endCxn id="6" idx="3"/>
+            </p:cNvCxnSpPr>
+            <p:nvPr/>
+          </p:nvCxnSpPr>
+          <p:spPr>
+            <a:xfrm flipH="1" flipV="1">
+              <a:off x="7181011" y="2167495"/>
+              <a:ext cx="11690" cy="2392739"/>
+            </a:xfrm>
+            <a:prstGeom prst="bentConnector3">
+              <a:avLst>
+                <a:gd name="adj1" fmla="val -2025346"/>
+              </a:avLst>
+            </a:prstGeom>
+            <a:ln w="28575">
+              <a:tailEnd type="triangle"/>
+            </a:ln>
+          </p:spPr>
+          <p:style>
+            <a:lnRef idx="2">
+              <a:schemeClr val="dk1"/>
+            </a:lnRef>
+            <a:fillRef idx="0">
+              <a:schemeClr val="dk1"/>
+            </a:fillRef>
+            <a:effectRef idx="1">
+              <a:schemeClr val="dk1"/>
+            </a:effectRef>
+            <a:fontRef idx="minor">
+              <a:schemeClr val="tx1"/>
+            </a:fontRef>
+          </p:style>
+        </p:cxnSp>
+        <p:sp>
+          <p:nvSpPr>
+            <p:cNvPr id="26" name="TextBox 25">
+              <a:extLst>
+                <a:ext uri="{FF2B5EF4-FFF2-40B4-BE49-F238E27FC236}">
+                  <a16:creationId xmlns:a16="http://schemas.microsoft.com/office/drawing/2014/main" id="{A2E8D997-8E73-1646-ED76-FDAC14CA65E2}"/>
+                </a:ext>
+              </a:extLst>
+            </p:cNvPr>
+            <p:cNvSpPr txBox="1"/>
+            <p:nvPr/>
+          </p:nvSpPr>
+          <p:spPr>
+            <a:xfrm>
+              <a:off x="5705937" y="4014072"/>
+              <a:ext cx="365806" cy="261610"/>
+            </a:xfrm>
+            <a:prstGeom prst="rect">
+              <a:avLst/>
+            </a:prstGeom>
+            <a:noFill/>
+          </p:spPr>
+          <p:txBody>
+            <a:bodyPr wrap="none" rtlCol="0">
+              <a:spAutoFit/>
+            </a:bodyPr>
+            <a:lstStyle/>
+            <a:p>
+              <a:r>
+                <a:rPr lang="en-US" altLang="zh-CN" sz="1100" dirty="0">
+                  <a:latin typeface="Arial" panose="020B0604020202020204" pitchFamily="34" charset="0"/>
+                  <a:cs typeface="Arial" panose="020B0604020202020204" pitchFamily="34" charset="0"/>
+                </a:rPr>
+                <a:t>No</a:t>
+              </a:r>
+              <a:endParaRPr lang="en-CA" dirty="0">
+                <a:latin typeface="Arial" panose="020B0604020202020204" pitchFamily="34" charset="0"/>
+                <a:cs typeface="Arial" panose="020B0604020202020204" pitchFamily="34" charset="0"/>
+              </a:endParaRPr>
+            </a:p>
+          </p:txBody>
+        </p:sp>
+        <p:sp>
+          <p:nvSpPr>
+            <p:cNvPr id="27" name="TextBox 26">
+              <a:extLst>
+                <a:ext uri="{FF2B5EF4-FFF2-40B4-BE49-F238E27FC236}">
+                  <a16:creationId xmlns:a16="http://schemas.microsoft.com/office/drawing/2014/main" id="{C96BB663-DD7A-8F35-C9C8-83DECC467FD3}"/>
+                </a:ext>
+              </a:extLst>
+            </p:cNvPr>
+            <p:cNvSpPr txBox="1"/>
+            <p:nvPr/>
+          </p:nvSpPr>
+          <p:spPr>
+            <a:xfrm>
+              <a:off x="3993198" y="3529771"/>
+              <a:ext cx="452265" cy="261610"/>
+            </a:xfrm>
+            <a:prstGeom prst="rect">
+              <a:avLst/>
+            </a:prstGeom>
+            <a:noFill/>
+          </p:spPr>
+          <p:txBody>
+            <a:bodyPr wrap="square" rtlCol="0">
+              <a:spAutoFit/>
+            </a:bodyPr>
+            <a:lstStyle/>
+            <a:p>
+              <a:r>
+                <a:rPr lang="en-CA" sz="1100" dirty="0">
+                  <a:latin typeface="Arial" panose="020B0604020202020204" pitchFamily="34" charset="0"/>
+                  <a:cs typeface="Arial" panose="020B0604020202020204" pitchFamily="34" charset="0"/>
+                </a:rPr>
+                <a:t>Yes</a:t>
+              </a:r>
+              <a:endParaRPr lang="en-CA" sz="1600" dirty="0">
+                <a:latin typeface="Arial" panose="020B0604020202020204" pitchFamily="34" charset="0"/>
+                <a:cs typeface="Arial" panose="020B0604020202020204" pitchFamily="34" charset="0"/>
+              </a:endParaRPr>
+            </a:p>
+          </p:txBody>
+        </p:sp>
+        <p:cxnSp>
+          <p:nvCxnSpPr>
+            <p:cNvPr id="28" name="Straight Arrow Connector 27">
+              <a:extLst>
+                <a:ext uri="{FF2B5EF4-FFF2-40B4-BE49-F238E27FC236}">
+                  <a16:creationId xmlns:a16="http://schemas.microsoft.com/office/drawing/2014/main" id="{D6FA1103-FF70-8B71-68EC-DDB22CF1BE8C}"/>
+                </a:ext>
+              </a:extLst>
+            </p:cNvPr>
+            <p:cNvCxnSpPr>
+              <a:cxnSpLocks/>
+            </p:cNvCxnSpPr>
+            <p:nvPr/>
+          </p:nvCxnSpPr>
+          <p:spPr>
+            <a:xfrm flipH="1">
+              <a:off x="3837014" y="3763818"/>
+              <a:ext cx="463089" cy="0"/>
+            </a:xfrm>
+            <a:prstGeom prst="straightConnector1">
+              <a:avLst/>
+            </a:prstGeom>
+            <a:ln w="28575">
+              <a:tailEnd type="triangle"/>
+            </a:ln>
+          </p:spPr>
+          <p:style>
+            <a:lnRef idx="2">
+              <a:schemeClr val="dk1"/>
+            </a:lnRef>
+            <a:fillRef idx="0">
+              <a:schemeClr val="dk1"/>
+            </a:fillRef>
+            <a:effectRef idx="1">
+              <a:schemeClr val="dk1"/>
+            </a:effectRef>
+            <a:fontRef idx="minor">
+              <a:schemeClr val="tx1"/>
+            </a:fontRef>
+          </p:style>
+        </p:cxnSp>
+        <mc:AlternateContent xmlns:mc="http://schemas.openxmlformats.org/markup-compatibility/2006">
+          <mc:Choice xmlns:a14="http://schemas.microsoft.com/office/drawing/2010/main" Requires="a14">
+            <p:sp>
+              <p:nvSpPr>
+                <p:cNvPr id="31" name="Rectangle: Rounded Corners 119">
+                  <a:extLst>
+                    <a:ext uri="{FF2B5EF4-FFF2-40B4-BE49-F238E27FC236}">
+                      <a16:creationId xmlns:a16="http://schemas.microsoft.com/office/drawing/2014/main" id="{C3C79FFE-FE84-5F3D-7B15-9BC22B6ACBE8}"/>
+                    </a:ext>
+                  </a:extLst>
+                </p:cNvPr>
+                <p:cNvSpPr/>
+                <p:nvPr/>
+              </p:nvSpPr>
+              <p:spPr>
+                <a:xfrm>
+                  <a:off x="2024744" y="3510807"/>
+                  <a:ext cx="1812270" cy="521186"/>
+                </a:xfrm>
+                <a:prstGeom prst="roundRect">
+                  <a:avLst/>
+                </a:prstGeom>
+                <a:solidFill>
+                  <a:schemeClr val="accent2">
+                    <a:lumMod val="40000"/>
+                    <a:lumOff val="60000"/>
+                  </a:schemeClr>
+                </a:solidFill>
+                <a:ln w="34925" cap="flat" cmpd="sng" algn="ctr">
+                  <a:solidFill>
+                    <a:sysClr val="windowText" lastClr="000000"/>
+                  </a:solidFill>
+                  <a:prstDash val="solid"/>
+                  <a:miter lim="800000"/>
+                </a:ln>
+                <a:effectLst/>
+              </p:spPr>
+              <p:txBody>
+                <a:bodyPr rtlCol="0" anchor="ctr"/>
+                <a:lstStyle/>
+                <a:p>
+                  <a:pPr algn="ctr">
+                    <a:defRPr/>
+                  </a:pPr>
+                  <a:r>
+                    <a:rPr lang="en-CA" altLang="zh-CN" sz="1200" b="1" dirty="0">
+                      <a:latin typeface="Arial" panose="020B0604020202020204" pitchFamily="34" charset="0"/>
+                      <a:cs typeface="Arial" panose="020B0604020202020204" pitchFamily="34" charset="0"/>
+                    </a:rPr>
+                    <a:t>Inversion results: </a:t>
+                  </a:r>
+                </a:p>
+                <a:p>
+                  <a:pPr algn="ctr">
+                    <a:defRPr/>
+                  </a:pPr>
+                  <a:r>
+                    <a:rPr lang="en-US" altLang="zh-CN" b="1" dirty="0">
+                      <a:latin typeface="Arial" panose="020B0604020202020204" pitchFamily="34" charset="0"/>
+                      <a:cs typeface="Arial" panose="020B0604020202020204" pitchFamily="34" charset="0"/>
+                    </a:rPr>
+                    <a:t> </a:t>
+                  </a:r>
+                  <a14:m>
+                    <m:oMath xmlns:m="http://schemas.openxmlformats.org/officeDocument/2006/math">
+                      <m:sSup>
+                        <m:sSupPr>
+                          <m:ctrlPr>
+                            <a:rPr lang="en-CA" altLang="zh-CN" b="1" i="1" dirty="0">
+                              <a:latin typeface="Cambria Math" panose="02040503050406030204" pitchFamily="18" charset="0"/>
+                              <a:cs typeface="Arial" panose="020B0604020202020204" pitchFamily="34" charset="0"/>
+                            </a:rPr>
+                          </m:ctrlPr>
+                        </m:sSupPr>
+                        <m:e>
+                          <m:r>
+                            <m:rPr>
+                              <m:sty m:val="p"/>
+                            </m:rPr>
+                            <a:rPr lang="el-GR" altLang="zh-CN" i="1">
+                              <a:latin typeface="Cambria Math" panose="02040503050406030204" pitchFamily="18" charset="0"/>
+                              <a:cs typeface="Arial" panose="020B0604020202020204" pitchFamily="34" charset="0"/>
+                            </a:rPr>
+                            <m:t>λ</m:t>
+                          </m:r>
+                        </m:e>
+                        <m:sup>
+                          <m:r>
+                            <a:rPr lang="en-CA" altLang="zh-CN" b="1" i="1" dirty="0" smtClean="0">
+                              <a:solidFill>
+                                <a:srgbClr val="FF0000"/>
+                              </a:solidFill>
+                              <a:latin typeface="Cambria Math" panose="02040503050406030204" pitchFamily="18" charset="0"/>
+                              <a:cs typeface="Arial" panose="020B0604020202020204" pitchFamily="34" charset="0"/>
+                            </a:rPr>
+                            <m:t>∗</m:t>
+                          </m:r>
+                        </m:sup>
+                      </m:sSup>
+                    </m:oMath>
+                  </a14:m>
+                  <a:r>
+                    <a:rPr lang="en-CA" altLang="zh-CN" sz="1400" b="1" dirty="0">
+                      <a:latin typeface="Arial" panose="020B0604020202020204" pitchFamily="34" charset="0"/>
+                      <a:cs typeface="Arial" panose="020B0604020202020204" pitchFamily="34" charset="0"/>
+                    </a:rPr>
+                    <a:t> </a:t>
+                  </a:r>
+                </a:p>
+              </p:txBody>
+            </p:sp>
+          </mc:Choice>
+          <mc:Fallback>
+            <p:sp>
+              <p:nvSpPr>
+                <p:cNvPr id="31" name="Rectangle: Rounded Corners 119">
+                  <a:extLst>
+                    <a:ext uri="{FF2B5EF4-FFF2-40B4-BE49-F238E27FC236}">
+                      <a16:creationId xmlns:a16="http://schemas.microsoft.com/office/drawing/2014/main" id="{C3C79FFE-FE84-5F3D-7B15-9BC22B6ACBE8}"/>
+                    </a:ext>
+                  </a:extLst>
+                </p:cNvPr>
+                <p:cNvSpPr>
+                  <a:spLocks noRot="1" noChangeAspect="1" noMove="1" noResize="1" noEditPoints="1" noAdjustHandles="1" noChangeArrowheads="1" noChangeShapeType="1" noTextEdit="1"/>
+                </p:cNvSpPr>
+                <p:nvPr/>
+              </p:nvSpPr>
+              <p:spPr>
+                <a:xfrm>
+                  <a:off x="2024744" y="3510807"/>
+                  <a:ext cx="1812270" cy="521186"/>
+                </a:xfrm>
+                <a:prstGeom prst="roundRect">
+                  <a:avLst/>
+                </a:prstGeom>
+                <a:blipFill>
+                  <a:blip r:embed="rId8"/>
+                  <a:stretch>
+                    <a:fillRect/>
+                  </a:stretch>
+                </a:blipFill>
+                <a:ln w="34925" cap="flat" cmpd="sng" algn="ctr">
+                  <a:solidFill>
+                    <a:sysClr val="windowText" lastClr="000000"/>
+                  </a:solidFill>
+                  <a:prstDash val="solid"/>
+                  <a:miter lim="800000"/>
+                </a:ln>
+                <a:effectLst/>
+              </p:spPr>
+              <p:txBody>
+                <a:bodyPr/>
+                <a:lstStyle/>
+                <a:p>
+                  <a:r>
+                    <a:rPr lang="en-CA">
+                      <a:noFill/>
+                    </a:rPr>
+                    <a:t> </a:t>
+                  </a:r>
+                </a:p>
+              </p:txBody>
+            </p:sp>
+          </mc:Fallback>
+        </mc:AlternateContent>
+      </p:grpSp>
+    </p:spTree>
+    <p:extLst>
+      <p:ext uri="{BB962C8B-B14F-4D97-AF65-F5344CB8AC3E}">
+        <p14:creationId xmlns:p14="http://schemas.microsoft.com/office/powerpoint/2010/main" val="2572174734"/>
+      </p:ext>
+    </p:extLst>
+  </p:cSld>
+  <p:clrMapOvr>
+    <a:masterClrMapping/>
+  </p:clrMapOvr>
+</p:sld>
+</file>
+
+<file path=ppt/slides/slide3.xml><?xml version="1.0" encoding="utf-8"?>
 <p:sld xmlns:a="http://schemas.openxmlformats.org/drawingml/2006/main" xmlns:r="http://schemas.openxmlformats.org/officeDocument/2006/relationships" xmlns:p="http://schemas.openxmlformats.org/presentationml/2006/main">
   <p:cSld>
     <p:spTree>
